--- a/26/Razonamiento con Incertidumbre/P1/P1_Planificación.pptx
+++ b/26/Razonamiento con Incertidumbre/P1/P1_Planificación.pptx
@@ -19,6 +19,7 @@
     <p:sldId xmlns:r="http://schemas.openxmlformats.org/officeDocument/2006/relationships" id="264" r:id="R50f45ba5a64541a1"/>
     <p:sldId xmlns:r="http://schemas.openxmlformats.org/officeDocument/2006/relationships" id="265" r:id="R76471bad4090463f"/>
     <p:sldId xmlns:r="http://schemas.openxmlformats.org/officeDocument/2006/relationships" id="266" r:id="R9ed96c3ad18e49c9"/>
+    <p:sldId xmlns:ns1="http://schemas.openxmlformats.org/officeDocument/2006/relationships" id="269" ns1:id="rIdGanttGuidance"/>
     <p:sldId xmlns:r="http://schemas.openxmlformats.org/officeDocument/2006/relationships" id="267" r:id="R14691ca826244383"/>
     <p:sldId xmlns:r="http://schemas.openxmlformats.org/officeDocument/2006/relationships" id="268" r:id="Rf544d2a0189644c4"/>
   </p:sldIdLst>
@@ -2635,16 +2636,15 @@
         </p:nvGraphicFramePr>
         <p:xfrm>
           <a:off xmlns:a="http://schemas.openxmlformats.org/drawingml/2006/main" x="609600" y="1952625"/>
-          <a:ext xmlns:a="http://schemas.openxmlformats.org/drawingml/2006/main" cx="10934700" cy="3571875"/>
+          <a:ext xmlns:a="http://schemas.openxmlformats.org/drawingml/2006/main" cx="10934700" cy="3214692"/>
         </p:xfrm>
         <a:graphic xmlns:a="http://schemas.openxmlformats.org/drawingml/2006/main">
           <a:graphicData uri="http://schemas.openxmlformats.org/drawingml/2006/table">
             <a:tbl>
               <a:tblPr/>
               <a:tblGrid>
-                <a:gridCol w="3390900"/>
+                <a:gridCol w="3943350"/>
                 <a:gridCol w="914400"/>
-                <a:gridCol w="552450"/>
                 <a:gridCol w="552450"/>
                 <a:gridCol w="552450"/>
                 <a:gridCol w="552450"/>
@@ -2720,30 +2720,6 @@
                           <a:ea typeface="Arial"/>
                           <a:cs typeface="Arial"/>
                         </a:rPr>
-                        <a:t>S3</a:t>
-                      </a:r>
-                    </a:p>
-                  </a:txBody>
-                  <a:tcPr marL="91440" marR="91440" marT="45720" marB="45720">
-                    <a:solidFill>
-                      <a:srgbClr val="D96B18"/>
-                    </a:solidFill>
-                  </a:tcPr>
-                </a:tc>
-                <a:tc>
-                  <a:txBody>
-                    <a:bodyPr/>
-                    <a:lstStyle/>
-                    <a:p>
-                      <a:r>
-                        <a:rPr sz="1200" b="1">
-                          <a:solidFill>
-                            <a:srgbClr val="FFFFFF"/>
-                          </a:solidFill>
-                          <a:latin typeface="Arial"/>
-                          <a:ea typeface="Arial"/>
-                          <a:cs typeface="Arial"/>
-                        </a:rPr>
                         <a:t>S4</a:t>
                       </a:r>
                     </a:p>
@@ -3002,55 +2978,31 @@
                     <a:lstStyle/>
                     <a:p>
                       <a:r>
-                        <a:rPr sz="1200" b="0">
-                          <a:solidFill>
-                            <a:srgbClr val="233746"/>
-                          </a:solidFill>
-                          <a:latin typeface="Arial"/>
-                          <a:ea typeface="Arial"/>
-                          <a:cs typeface="Arial"/>
-                        </a:rPr>
-                        <a:t>Planificación</a:t>
-                      </a:r>
-                    </a:p>
-                  </a:txBody>
-                  <a:tcPr marL="91440" marR="91440" marT="45720" marB="45720">
-                    <a:solidFill>
-                      <a:srgbClr val="FFF3E8"/>
-                    </a:solidFill>
-                  </a:tcPr>
-                </a:tc>
-                <a:tc>
-                  <a:txBody>
-                    <a:bodyPr/>
-                    <a:lstStyle/>
-                    <a:p>
-                      <a:r>
-                        <a:rPr sz="1200" b="0">
-                          <a:solidFill>
-                            <a:srgbClr val="233746"/>
-                          </a:solidFill>
-                          <a:latin typeface="Arial"/>
-                          <a:ea typeface="Arial"/>
-                          <a:cs typeface="Arial"/>
-                        </a:rPr>
-                        <a:t>A y B</a:t>
-                      </a:r>
-                    </a:p>
-                  </a:txBody>
-                  <a:tcPr marL="91440" marR="91440" marT="45720" marB="45720">
-                    <a:solidFill>
-                      <a:srgbClr val="FFF3E8"/>
-                    </a:solidFill>
-                  </a:tcPr>
-                </a:tc>
-                <a:tc>
-                  <a:txBody>
-                    <a:bodyPr/>
-                    <a:lstStyle/>
-                    <a:p>
-                      <a:r>
-                        <a:rPr sz="1200" b="0">
+                        <a:rPr sz="1200" b="1">
+                          <a:solidFill>
+                            <a:srgbClr val="233746"/>
+                          </a:solidFill>
+                          <a:latin typeface="Arial"/>
+                          <a:ea typeface="Arial"/>
+                          <a:cs typeface="Arial"/>
+                        </a:rPr>
+                        <a:t>Incremento 1 · Prototipo</a:t>
+                      </a:r>
+                    </a:p>
+                  </a:txBody>
+                  <a:tcPr marL="91440" marR="91440" marT="45720" marB="45720">
+                    <a:solidFill>
+                      <a:srgbClr val="FFFFFF"/>
+                    </a:solidFill>
+                  </a:tcPr>
+                </a:tc>
+                <a:tc>
+                  <a:txBody>
+                    <a:bodyPr/>
+                    <a:lstStyle/>
+                    <a:p>
+                      <a:r>
+                        <a:rPr sz="1200" b="1">
                           <a:solidFill>
                             <a:srgbClr val="233746"/>
                           </a:solidFill>
@@ -3064,41 +3016,17 @@
                   </a:txBody>
                   <a:tcPr marL="91440" marR="91440" marT="45720" marB="45720">
                     <a:solidFill>
-                      <a:srgbClr val="D96B18"/>
-                    </a:solidFill>
-                  </a:tcPr>
-                </a:tc>
-                <a:tc>
-                  <a:txBody>
-                    <a:bodyPr/>
-                    <a:lstStyle/>
-                    <a:p>
-                      <a:r>
-                        <a:rPr sz="1350" b="1">
-                          <a:solidFill>
-                            <a:srgbClr val="2162A0"/>
-                          </a:solidFill>
-                          <a:latin typeface="Arial"/>
-                          <a:ea typeface="Arial"/>
-                          <a:cs typeface="Arial"/>
-                        </a:rPr>
-                        <a:t>●</a:t>
-                      </a:r>
-                    </a:p>
-                  </a:txBody>
-                  <a:tcPr marL="91440" marR="91440" marT="45720" marB="45720">
-                    <a:solidFill>
-                      <a:srgbClr val="E8F1FA"/>
-                    </a:solidFill>
-                  </a:tcPr>
-                </a:tc>
-                <a:tc>
-                  <a:txBody>
-                    <a:bodyPr/>
-                    <a:lstStyle/>
-                    <a:p>
-                      <a:r>
-                        <a:rPr sz="1200" b="0">
+                      <a:srgbClr val="FFFFFF"/>
+                    </a:solidFill>
+                  </a:tcPr>
+                </a:tc>
+                <a:tc>
+                  <a:txBody>
+                    <a:bodyPr/>
+                    <a:lstStyle/>
+                    <a:p>
+                      <a:r>
+                        <a:rPr sz="1200" b="1">
                           <a:solidFill>
                             <a:srgbClr val="233746"/>
                           </a:solidFill>
@@ -3112,17 +3040,17 @@
                   </a:txBody>
                   <a:tcPr marL="91440" marR="91440" marT="45720" marB="45720">
                     <a:solidFill>
-                      <a:srgbClr val="FFF3E8"/>
-                    </a:solidFill>
-                  </a:tcPr>
-                </a:tc>
-                <a:tc>
-                  <a:txBody>
-                    <a:bodyPr/>
-                    <a:lstStyle/>
-                    <a:p>
-                      <a:r>
-                        <a:rPr sz="1200" b="0">
+                      <a:srgbClr val="E8AD7C"/>
+                    </a:solidFill>
+                  </a:tcPr>
+                </a:tc>
+                <a:tc>
+                  <a:txBody>
+                    <a:bodyPr/>
+                    <a:lstStyle/>
+                    <a:p>
+                      <a:r>
+                        <a:rPr sz="1200" b="1">
                           <a:solidFill>
                             <a:srgbClr val="233746"/>
                           </a:solidFill>
@@ -3136,17 +3064,17 @@
                   </a:txBody>
                   <a:tcPr marL="91440" marR="91440" marT="45720" marB="45720">
                     <a:solidFill>
-                      <a:srgbClr val="FFF3E8"/>
-                    </a:solidFill>
-                  </a:tcPr>
-                </a:tc>
-                <a:tc>
-                  <a:txBody>
-                    <a:bodyPr/>
-                    <a:lstStyle/>
-                    <a:p>
-                      <a:r>
-                        <a:rPr sz="1200" b="0">
+                      <a:srgbClr val="E8AD7C"/>
+                    </a:solidFill>
+                  </a:tcPr>
+                </a:tc>
+                <a:tc>
+                  <a:txBody>
+                    <a:bodyPr/>
+                    <a:lstStyle/>
+                    <a:p>
+                      <a:r>
+                        <a:rPr sz="1200" b="1">
                           <a:solidFill>
                             <a:srgbClr val="233746"/>
                           </a:solidFill>
@@ -3160,17 +3088,17 @@
                   </a:txBody>
                   <a:tcPr marL="91440" marR="91440" marT="45720" marB="45720">
                     <a:solidFill>
-                      <a:srgbClr val="FFF3E8"/>
-                    </a:solidFill>
-                  </a:tcPr>
-                </a:tc>
-                <a:tc>
-                  <a:txBody>
-                    <a:bodyPr/>
-                    <a:lstStyle/>
-                    <a:p>
-                      <a:r>
-                        <a:rPr sz="1200" b="0">
+                      <a:srgbClr val="E8AD7C"/>
+                    </a:solidFill>
+                  </a:tcPr>
+                </a:tc>
+                <a:tc>
+                  <a:txBody>
+                    <a:bodyPr/>
+                    <a:lstStyle/>
+                    <a:p>
+                      <a:r>
+                        <a:rPr sz="1200" b="1">
                           <a:solidFill>
                             <a:srgbClr val="233746"/>
                           </a:solidFill>
@@ -3184,17 +3112,17 @@
                   </a:txBody>
                   <a:tcPr marL="91440" marR="91440" marT="45720" marB="45720">
                     <a:solidFill>
-                      <a:srgbClr val="FFF3E8"/>
-                    </a:solidFill>
-                  </a:tcPr>
-                </a:tc>
-                <a:tc>
-                  <a:txBody>
-                    <a:bodyPr/>
-                    <a:lstStyle/>
-                    <a:p>
-                      <a:r>
-                        <a:rPr sz="1200" b="0">
+                      <a:srgbClr val="E8AD7C"/>
+                    </a:solidFill>
+                  </a:tcPr>
+                </a:tc>
+                <a:tc>
+                  <a:txBody>
+                    <a:bodyPr/>
+                    <a:lstStyle/>
+                    <a:p>
+                      <a:r>
+                        <a:rPr sz="1200" b="1">
                           <a:solidFill>
                             <a:srgbClr val="233746"/>
                           </a:solidFill>
@@ -3208,17 +3136,17 @@
                   </a:txBody>
                   <a:tcPr marL="91440" marR="91440" marT="45720" marB="45720">
                     <a:solidFill>
-                      <a:srgbClr val="FFF3E8"/>
-                    </a:solidFill>
-                  </a:tcPr>
-                </a:tc>
-                <a:tc>
-                  <a:txBody>
-                    <a:bodyPr/>
-                    <a:lstStyle/>
-                    <a:p>
-                      <a:r>
-                        <a:rPr sz="1200" b="0">
+                      <a:srgbClr val="E8AD7C"/>
+                    </a:solidFill>
+                  </a:tcPr>
+                </a:tc>
+                <a:tc>
+                  <a:txBody>
+                    <a:bodyPr/>
+                    <a:lstStyle/>
+                    <a:p>
+                      <a:r>
+                        <a:rPr sz="1200" b="1">
                           <a:solidFill>
                             <a:srgbClr val="233746"/>
                           </a:solidFill>
@@ -3232,17 +3160,17 @@
                   </a:txBody>
                   <a:tcPr marL="91440" marR="91440" marT="45720" marB="45720">
                     <a:solidFill>
-                      <a:srgbClr val="FFF3E8"/>
-                    </a:solidFill>
-                  </a:tcPr>
-                </a:tc>
-                <a:tc>
-                  <a:txBody>
-                    <a:bodyPr/>
-                    <a:lstStyle/>
-                    <a:p>
-                      <a:r>
-                        <a:rPr sz="1200" b="0">
+                      <a:srgbClr val="FFFFFF"/>
+                    </a:solidFill>
+                  </a:tcPr>
+                </a:tc>
+                <a:tc>
+                  <a:txBody>
+                    <a:bodyPr/>
+                    <a:lstStyle/>
+                    <a:p>
+                      <a:r>
+                        <a:rPr sz="1200" b="1">
                           <a:solidFill>
                             <a:srgbClr val="233746"/>
                           </a:solidFill>
@@ -3256,17 +3184,17 @@
                   </a:txBody>
                   <a:tcPr marL="91440" marR="91440" marT="45720" marB="45720">
                     <a:solidFill>
-                      <a:srgbClr val="FFF3E8"/>
-                    </a:solidFill>
-                  </a:tcPr>
-                </a:tc>
-                <a:tc>
-                  <a:txBody>
-                    <a:bodyPr/>
-                    <a:lstStyle/>
-                    <a:p>
-                      <a:r>
-                        <a:rPr sz="1200" b="0">
+                      <a:srgbClr val="FFFFFF"/>
+                    </a:solidFill>
+                  </a:tcPr>
+                </a:tc>
+                <a:tc>
+                  <a:txBody>
+                    <a:bodyPr/>
+                    <a:lstStyle/>
+                    <a:p>
+                      <a:r>
+                        <a:rPr sz="1200" b="1">
                           <a:solidFill>
                             <a:srgbClr val="233746"/>
                           </a:solidFill>
@@ -3280,17 +3208,17 @@
                   </a:txBody>
                   <a:tcPr marL="91440" marR="91440" marT="45720" marB="45720">
                     <a:solidFill>
-                      <a:srgbClr val="FFF3E8"/>
-                    </a:solidFill>
-                  </a:tcPr>
-                </a:tc>
-                <a:tc>
-                  <a:txBody>
-                    <a:bodyPr/>
-                    <a:lstStyle/>
-                    <a:p>
-                      <a:r>
-                        <a:rPr sz="1200" b="0">
+                      <a:srgbClr val="FFFFFF"/>
+                    </a:solidFill>
+                  </a:tcPr>
+                </a:tc>
+                <a:tc>
+                  <a:txBody>
+                    <a:bodyPr/>
+                    <a:lstStyle/>
+                    <a:p>
+                      <a:r>
+                        <a:rPr sz="1200" b="1">
                           <a:solidFill>
                             <a:srgbClr val="233746"/>
                           </a:solidFill>
@@ -3304,17 +3232,17 @@
                   </a:txBody>
                   <a:tcPr marL="91440" marR="91440" marT="45720" marB="45720">
                     <a:solidFill>
-                      <a:srgbClr val="FFF3E8"/>
-                    </a:solidFill>
-                  </a:tcPr>
-                </a:tc>
-                <a:tc>
-                  <a:txBody>
-                    <a:bodyPr/>
-                    <a:lstStyle/>
-                    <a:p>
-                      <a:r>
-                        <a:rPr sz="1200" b="0">
+                      <a:srgbClr val="FFFFFF"/>
+                    </a:solidFill>
+                  </a:tcPr>
+                </a:tc>
+                <a:tc>
+                  <a:txBody>
+                    <a:bodyPr/>
+                    <a:lstStyle/>
+                    <a:p>
+                      <a:r>
+                        <a:rPr sz="1200" b="1">
                           <a:solidFill>
                             <a:srgbClr val="233746"/>
                           </a:solidFill>
@@ -3328,7 +3256,31 @@
                   </a:txBody>
                   <a:tcPr marL="91440" marR="91440" marT="45720" marB="45720">
                     <a:solidFill>
-                      <a:srgbClr val="FFF3E8"/>
+                      <a:srgbClr val="FFFFFF"/>
+                    </a:solidFill>
+                  </a:tcPr>
+                </a:tc>
+                <a:tc>
+                  <a:txBody>
+                    <a:bodyPr/>
+                    <a:lstStyle/>
+                    <a:p>
+                      <a:r>
+                        <a:rPr sz="1200" b="1">
+                          <a:solidFill>
+                            <a:srgbClr val="233746"/>
+                          </a:solidFill>
+                          <a:latin typeface="Arial"/>
+                          <a:ea typeface="Arial"/>
+                          <a:cs typeface="Arial"/>
+                        </a:rPr>
+                        <a:t/>
+                      </a:r>
+                    </a:p>
+                  </a:txBody>
+                  <a:tcPr marL="91440" marR="91440" marT="45720" marB="45720">
+                    <a:solidFill>
+                      <a:srgbClr val="FFFFFF"/>
                     </a:solidFill>
                   </a:tcPr>
                 </a:tc>
@@ -3340,31 +3292,55 @@
                     <a:lstStyle/>
                     <a:p>
                       <a:r>
-                        <a:rPr sz="1200" b="1">
-                          <a:solidFill>
-                            <a:srgbClr val="233746"/>
-                          </a:solidFill>
-                          <a:latin typeface="Arial"/>
-                          <a:ea typeface="Arial"/>
-                          <a:cs typeface="Arial"/>
-                        </a:rPr>
-                        <a:t>Incremento 1 · Prototipo</a:t>
-                      </a:r>
-                    </a:p>
-                  </a:txBody>
-                  <a:tcPr marL="91440" marR="91440" marT="45720" marB="45720">
-                    <a:solidFill>
-                      <a:srgbClr val="FFFFFF"/>
-                    </a:solidFill>
-                  </a:tcPr>
-                </a:tc>
-                <a:tc>
-                  <a:txBody>
-                    <a:bodyPr/>
-                    <a:lstStyle/>
-                    <a:p>
-                      <a:r>
-                        <a:rPr sz="1200" b="1">
+                        <a:rPr sz="1200" b="0">
+                          <a:solidFill>
+                            <a:srgbClr val="233746"/>
+                          </a:solidFill>
+                          <a:latin typeface="Arial"/>
+                          <a:ea typeface="Arial"/>
+                          <a:cs typeface="Arial"/>
+                        </a:rPr>
+                        <a:t>Arquitectura y diseño</a:t>
+                      </a:r>
+                    </a:p>
+                  </a:txBody>
+                  <a:tcPr marL="91440" marR="91440" marT="45720" marB="45720">
+                    <a:solidFill>
+                      <a:srgbClr val="FFF3E8"/>
+                    </a:solidFill>
+                  </a:tcPr>
+                </a:tc>
+                <a:tc>
+                  <a:txBody>
+                    <a:bodyPr/>
+                    <a:lstStyle/>
+                    <a:p>
+                      <a:r>
+                        <a:rPr sz="1200" b="0">
+                          <a:solidFill>
+                            <a:srgbClr val="233746"/>
+                          </a:solidFill>
+                          <a:latin typeface="Arial"/>
+                          <a:ea typeface="Arial"/>
+                          <a:cs typeface="Arial"/>
+                        </a:rPr>
+                        <a:t>A y B</a:t>
+                      </a:r>
+                    </a:p>
+                  </a:txBody>
+                  <a:tcPr marL="91440" marR="91440" marT="45720" marB="45720">
+                    <a:solidFill>
+                      <a:srgbClr val="FFF3E8"/>
+                    </a:solidFill>
+                  </a:tcPr>
+                </a:tc>
+                <a:tc>
+                  <a:txBody>
+                    <a:bodyPr/>
+                    <a:lstStyle/>
+                    <a:p>
+                      <a:r>
+                        <a:rPr sz="1200" b="0">
                           <a:solidFill>
                             <a:srgbClr val="233746"/>
                           </a:solidFill>
@@ -3378,17 +3354,17 @@
                   </a:txBody>
                   <a:tcPr marL="91440" marR="91440" marT="45720" marB="45720">
                     <a:solidFill>
-                      <a:srgbClr val="FFFFFF"/>
-                    </a:solidFill>
-                  </a:tcPr>
-                </a:tc>
-                <a:tc>
-                  <a:txBody>
-                    <a:bodyPr/>
-                    <a:lstStyle/>
-                    <a:p>
-                      <a:r>
-                        <a:rPr sz="1200" b="1">
+                      <a:srgbClr val="D96B18"/>
+                    </a:solidFill>
+                  </a:tcPr>
+                </a:tc>
+                <a:tc>
+                  <a:txBody>
+                    <a:bodyPr/>
+                    <a:lstStyle/>
+                    <a:p>
+                      <a:r>
+                        <a:rPr sz="1200" b="0">
                           <a:solidFill>
                             <a:srgbClr val="233746"/>
                           </a:solidFill>
@@ -3402,17 +3378,17 @@
                   </a:txBody>
                   <a:tcPr marL="91440" marR="91440" marT="45720" marB="45720">
                     <a:solidFill>
-                      <a:srgbClr val="FFFFFF"/>
-                    </a:solidFill>
-                  </a:tcPr>
-                </a:tc>
-                <a:tc>
-                  <a:txBody>
-                    <a:bodyPr/>
-                    <a:lstStyle/>
-                    <a:p>
-                      <a:r>
-                        <a:rPr sz="1200" b="1">
+                      <a:srgbClr val="D96B18"/>
+                    </a:solidFill>
+                  </a:tcPr>
+                </a:tc>
+                <a:tc>
+                  <a:txBody>
+                    <a:bodyPr/>
+                    <a:lstStyle/>
+                    <a:p>
+                      <a:r>
+                        <a:rPr sz="1200" b="0">
                           <a:solidFill>
                             <a:srgbClr val="233746"/>
                           </a:solidFill>
@@ -3426,17 +3402,41 @@
                   </a:txBody>
                   <a:tcPr marL="91440" marR="91440" marT="45720" marB="45720">
                     <a:solidFill>
-                      <a:srgbClr val="E8AD7C"/>
-                    </a:solidFill>
-                  </a:tcPr>
-                </a:tc>
-                <a:tc>
-                  <a:txBody>
-                    <a:bodyPr/>
-                    <a:lstStyle/>
-                    <a:p>
-                      <a:r>
-                        <a:rPr sz="1200" b="1">
+                      <a:srgbClr val="D96B18"/>
+                    </a:solidFill>
+                  </a:tcPr>
+                </a:tc>
+                <a:tc>
+                  <a:txBody>
+                    <a:bodyPr/>
+                    <a:lstStyle/>
+                    <a:p>
+                      <a:r>
+                        <a:rPr sz="1350" b="1">
+                          <a:solidFill>
+                            <a:srgbClr val="2162A0"/>
+                          </a:solidFill>
+                          <a:latin typeface="Arial"/>
+                          <a:ea typeface="Arial"/>
+                          <a:cs typeface="Arial"/>
+                        </a:rPr>
+                        <a:t>●</a:t>
+                      </a:r>
+                    </a:p>
+                  </a:txBody>
+                  <a:tcPr marL="91440" marR="91440" marT="45720" marB="45720">
+                    <a:solidFill>
+                      <a:srgbClr val="E8F1FA"/>
+                    </a:solidFill>
+                  </a:tcPr>
+                </a:tc>
+                <a:tc>
+                  <a:txBody>
+                    <a:bodyPr/>
+                    <a:lstStyle/>
+                    <a:p>
+                      <a:r>
+                        <a:rPr sz="1200" b="0">
                           <a:solidFill>
                             <a:srgbClr val="233746"/>
                           </a:solidFill>
@@ -3450,17 +3450,17 @@
                   </a:txBody>
                   <a:tcPr marL="91440" marR="91440" marT="45720" marB="45720">
                     <a:solidFill>
-                      <a:srgbClr val="E8AD7C"/>
-                    </a:solidFill>
-                  </a:tcPr>
-                </a:tc>
-                <a:tc>
-                  <a:txBody>
-                    <a:bodyPr/>
-                    <a:lstStyle/>
-                    <a:p>
-                      <a:r>
-                        <a:rPr sz="1200" b="1">
+                      <a:srgbClr val="FFF3E8"/>
+                    </a:solidFill>
+                  </a:tcPr>
+                </a:tc>
+                <a:tc>
+                  <a:txBody>
+                    <a:bodyPr/>
+                    <a:lstStyle/>
+                    <a:p>
+                      <a:r>
+                        <a:rPr sz="1200" b="0">
                           <a:solidFill>
                             <a:srgbClr val="233746"/>
                           </a:solidFill>
@@ -3474,17 +3474,17 @@
                   </a:txBody>
                   <a:tcPr marL="91440" marR="91440" marT="45720" marB="45720">
                     <a:solidFill>
-                      <a:srgbClr val="E8AD7C"/>
-                    </a:solidFill>
-                  </a:tcPr>
-                </a:tc>
-                <a:tc>
-                  <a:txBody>
-                    <a:bodyPr/>
-                    <a:lstStyle/>
-                    <a:p>
-                      <a:r>
-                        <a:rPr sz="1200" b="1">
+                      <a:srgbClr val="FFF3E8"/>
+                    </a:solidFill>
+                  </a:tcPr>
+                </a:tc>
+                <a:tc>
+                  <a:txBody>
+                    <a:bodyPr/>
+                    <a:lstStyle/>
+                    <a:p>
+                      <a:r>
+                        <a:rPr sz="1200" b="0">
                           <a:solidFill>
                             <a:srgbClr val="233746"/>
                           </a:solidFill>
@@ -3498,17 +3498,17 @@
                   </a:txBody>
                   <a:tcPr marL="91440" marR="91440" marT="45720" marB="45720">
                     <a:solidFill>
-                      <a:srgbClr val="E8AD7C"/>
-                    </a:solidFill>
-                  </a:tcPr>
-                </a:tc>
-                <a:tc>
-                  <a:txBody>
-                    <a:bodyPr/>
-                    <a:lstStyle/>
-                    <a:p>
-                      <a:r>
-                        <a:rPr sz="1200" b="1">
+                      <a:srgbClr val="FFF3E8"/>
+                    </a:solidFill>
+                  </a:tcPr>
+                </a:tc>
+                <a:tc>
+                  <a:txBody>
+                    <a:bodyPr/>
+                    <a:lstStyle/>
+                    <a:p>
+                      <a:r>
+                        <a:rPr sz="1200" b="0">
                           <a:solidFill>
                             <a:srgbClr val="233746"/>
                           </a:solidFill>
@@ -3522,17 +3522,17 @@
                   </a:txBody>
                   <a:tcPr marL="91440" marR="91440" marT="45720" marB="45720">
                     <a:solidFill>
-                      <a:srgbClr val="E8AD7C"/>
-                    </a:solidFill>
-                  </a:tcPr>
-                </a:tc>
-                <a:tc>
-                  <a:txBody>
-                    <a:bodyPr/>
-                    <a:lstStyle/>
-                    <a:p>
-                      <a:r>
-                        <a:rPr sz="1200" b="1">
+                      <a:srgbClr val="FFF3E8"/>
+                    </a:solidFill>
+                  </a:tcPr>
+                </a:tc>
+                <a:tc>
+                  <a:txBody>
+                    <a:bodyPr/>
+                    <a:lstStyle/>
+                    <a:p>
+                      <a:r>
+                        <a:rPr sz="1200" b="0">
                           <a:solidFill>
                             <a:srgbClr val="233746"/>
                           </a:solidFill>
@@ -3546,17 +3546,17 @@
                   </a:txBody>
                   <a:tcPr marL="91440" marR="91440" marT="45720" marB="45720">
                     <a:solidFill>
-                      <a:srgbClr val="FFFFFF"/>
-                    </a:solidFill>
-                  </a:tcPr>
-                </a:tc>
-                <a:tc>
-                  <a:txBody>
-                    <a:bodyPr/>
-                    <a:lstStyle/>
-                    <a:p>
-                      <a:r>
-                        <a:rPr sz="1200" b="1">
+                      <a:srgbClr val="FFF3E8"/>
+                    </a:solidFill>
+                  </a:tcPr>
+                </a:tc>
+                <a:tc>
+                  <a:txBody>
+                    <a:bodyPr/>
+                    <a:lstStyle/>
+                    <a:p>
+                      <a:r>
+                        <a:rPr sz="1200" b="0">
                           <a:solidFill>
                             <a:srgbClr val="233746"/>
                           </a:solidFill>
@@ -3570,17 +3570,17 @@
                   </a:txBody>
                   <a:tcPr marL="91440" marR="91440" marT="45720" marB="45720">
                     <a:solidFill>
-                      <a:srgbClr val="FFFFFF"/>
-                    </a:solidFill>
-                  </a:tcPr>
-                </a:tc>
-                <a:tc>
-                  <a:txBody>
-                    <a:bodyPr/>
-                    <a:lstStyle/>
-                    <a:p>
-                      <a:r>
-                        <a:rPr sz="1200" b="1">
+                      <a:srgbClr val="FFF3E8"/>
+                    </a:solidFill>
+                  </a:tcPr>
+                </a:tc>
+                <a:tc>
+                  <a:txBody>
+                    <a:bodyPr/>
+                    <a:lstStyle/>
+                    <a:p>
+                      <a:r>
+                        <a:rPr sz="1200" b="0">
                           <a:solidFill>
                             <a:srgbClr val="233746"/>
                           </a:solidFill>
@@ -3594,79 +3594,7 @@
                   </a:txBody>
                   <a:tcPr marL="91440" marR="91440" marT="45720" marB="45720">
                     <a:solidFill>
-                      <a:srgbClr val="FFFFFF"/>
-                    </a:solidFill>
-                  </a:tcPr>
-                </a:tc>
-                <a:tc>
-                  <a:txBody>
-                    <a:bodyPr/>
-                    <a:lstStyle/>
-                    <a:p>
-                      <a:r>
-                        <a:rPr sz="1200" b="1">
-                          <a:solidFill>
-                            <a:srgbClr val="233746"/>
-                          </a:solidFill>
-                          <a:latin typeface="Arial"/>
-                          <a:ea typeface="Arial"/>
-                          <a:cs typeface="Arial"/>
-                        </a:rPr>
-                        <a:t/>
-                      </a:r>
-                    </a:p>
-                  </a:txBody>
-                  <a:tcPr marL="91440" marR="91440" marT="45720" marB="45720">
-                    <a:solidFill>
-                      <a:srgbClr val="FFFFFF"/>
-                    </a:solidFill>
-                  </a:tcPr>
-                </a:tc>
-                <a:tc>
-                  <a:txBody>
-                    <a:bodyPr/>
-                    <a:lstStyle/>
-                    <a:p>
-                      <a:r>
-                        <a:rPr sz="1200" b="1">
-                          <a:solidFill>
-                            <a:srgbClr val="233746"/>
-                          </a:solidFill>
-                          <a:latin typeface="Arial"/>
-                          <a:ea typeface="Arial"/>
-                          <a:cs typeface="Arial"/>
-                        </a:rPr>
-                        <a:t/>
-                      </a:r>
-                    </a:p>
-                  </a:txBody>
-                  <a:tcPr marL="91440" marR="91440" marT="45720" marB="45720">
-                    <a:solidFill>
-                      <a:srgbClr val="FFFFFF"/>
-                    </a:solidFill>
-                  </a:tcPr>
-                </a:tc>
-                <a:tc>
-                  <a:txBody>
-                    <a:bodyPr/>
-                    <a:lstStyle/>
-                    <a:p>
-                      <a:r>
-                        <a:rPr sz="1200" b="1">
-                          <a:solidFill>
-                            <a:srgbClr val="233746"/>
-                          </a:solidFill>
-                          <a:latin typeface="Arial"/>
-                          <a:ea typeface="Arial"/>
-                          <a:cs typeface="Arial"/>
-                        </a:rPr>
-                        <a:t/>
-                      </a:r>
-                    </a:p>
-                  </a:txBody>
-                  <a:tcPr marL="91440" marR="91440" marT="45720" marB="45720">
-                    <a:solidFill>
-                      <a:srgbClr val="FFFFFF"/>
+                      <a:srgbClr val="FFF3E8"/>
                     </a:solidFill>
                   </a:tcPr>
                 </a:tc>
@@ -3686,13 +3614,13 @@
                           <a:ea typeface="Arial"/>
                           <a:cs typeface="Arial"/>
                         </a:rPr>
-                        <a:t>Arquitectura y diseño</a:t>
-                      </a:r>
-                    </a:p>
-                  </a:txBody>
-                  <a:tcPr marL="91440" marR="91440" marT="45720" marB="45720">
-                    <a:solidFill>
-                      <a:srgbClr val="FFF3E8"/>
+                        <a:t>Implementación del prototipo</a:t>
+                      </a:r>
+                    </a:p>
+                  </a:txBody>
+                  <a:tcPr marL="91440" marR="91440" marT="45720" marB="45720">
+                    <a:solidFill>
+                      <a:srgbClr val="FFFFFF"/>
                     </a:solidFill>
                   </a:tcPr>
                 </a:tc>
@@ -3716,7 +3644,7 @@
                   </a:txBody>
                   <a:tcPr marL="91440" marR="91440" marT="45720" marB="45720">
                     <a:solidFill>
-                      <a:srgbClr val="FFF3E8"/>
+                      <a:srgbClr val="FFFFFF"/>
                     </a:solidFill>
                   </a:tcPr>
                 </a:tc>
@@ -3740,7 +3668,7 @@
                   </a:txBody>
                   <a:tcPr marL="91440" marR="91440" marT="45720" marB="45720">
                     <a:solidFill>
-                      <a:srgbClr val="FFF3E8"/>
+                      <a:srgbClr val="FFFFFF"/>
                     </a:solidFill>
                   </a:tcPr>
                 </a:tc>
@@ -3764,6 +3692,30 @@
                   </a:txBody>
                   <a:tcPr marL="91440" marR="91440" marT="45720" marB="45720">
                     <a:solidFill>
+                      <a:srgbClr val="FFFFFF"/>
+                    </a:solidFill>
+                  </a:tcPr>
+                </a:tc>
+                <a:tc>
+                  <a:txBody>
+                    <a:bodyPr/>
+                    <a:lstStyle/>
+                    <a:p>
+                      <a:r>
+                        <a:rPr sz="1200" b="0">
+                          <a:solidFill>
+                            <a:srgbClr val="233746"/>
+                          </a:solidFill>
+                          <a:latin typeface="Arial"/>
+                          <a:ea typeface="Arial"/>
+                          <a:cs typeface="Arial"/>
+                        </a:rPr>
+                        <a:t/>
+                      </a:r>
+                    </a:p>
+                  </a:txBody>
+                  <a:tcPr marL="91440" marR="91440" marT="45720" marB="45720">
+                    <a:solidFill>
                       <a:srgbClr val="D96B18"/>
                     </a:solidFill>
                   </a:tcPr>
@@ -3860,7 +3812,7 @@
                   </a:txBody>
                   <a:tcPr marL="91440" marR="91440" marT="45720" marB="45720">
                     <a:solidFill>
-                      <a:srgbClr val="FFF3E8"/>
+                      <a:srgbClr val="FFFFFF"/>
                     </a:solidFill>
                   </a:tcPr>
                 </a:tc>
@@ -3884,7 +3836,7 @@
                   </a:txBody>
                   <a:tcPr marL="91440" marR="91440" marT="45720" marB="45720">
                     <a:solidFill>
-                      <a:srgbClr val="FFF3E8"/>
+                      <a:srgbClr val="FFFFFF"/>
                     </a:solidFill>
                   </a:tcPr>
                 </a:tc>
@@ -3908,7 +3860,7 @@
                   </a:txBody>
                   <a:tcPr marL="91440" marR="91440" marT="45720" marB="45720">
                     <a:solidFill>
-                      <a:srgbClr val="FFF3E8"/>
+                      <a:srgbClr val="FFFFFF"/>
                     </a:solidFill>
                   </a:tcPr>
                 </a:tc>
@@ -3932,7 +3884,7 @@
                   </a:txBody>
                   <a:tcPr marL="91440" marR="91440" marT="45720" marB="45720">
                     <a:solidFill>
-                      <a:srgbClr val="FFF3E8"/>
+                      <a:srgbClr val="FFFFFF"/>
                     </a:solidFill>
                   </a:tcPr>
                 </a:tc>
@@ -3956,55 +3908,7 @@
                   </a:txBody>
                   <a:tcPr marL="91440" marR="91440" marT="45720" marB="45720">
                     <a:solidFill>
-                      <a:srgbClr val="FFF3E8"/>
-                    </a:solidFill>
-                  </a:tcPr>
-                </a:tc>
-                <a:tc>
-                  <a:txBody>
-                    <a:bodyPr/>
-                    <a:lstStyle/>
-                    <a:p>
-                      <a:r>
-                        <a:rPr sz="1200" b="0">
-                          <a:solidFill>
-                            <a:srgbClr val="233746"/>
-                          </a:solidFill>
-                          <a:latin typeface="Arial"/>
-                          <a:ea typeface="Arial"/>
-                          <a:cs typeface="Arial"/>
-                        </a:rPr>
-                        <a:t/>
-                      </a:r>
-                    </a:p>
-                  </a:txBody>
-                  <a:tcPr marL="91440" marR="91440" marT="45720" marB="45720">
-                    <a:solidFill>
-                      <a:srgbClr val="FFF3E8"/>
-                    </a:solidFill>
-                  </a:tcPr>
-                </a:tc>
-                <a:tc>
-                  <a:txBody>
-                    <a:bodyPr/>
-                    <a:lstStyle/>
-                    <a:p>
-                      <a:r>
-                        <a:rPr sz="1200" b="0">
-                          <a:solidFill>
-                            <a:srgbClr val="233746"/>
-                          </a:solidFill>
-                          <a:latin typeface="Arial"/>
-                          <a:ea typeface="Arial"/>
-                          <a:cs typeface="Arial"/>
-                        </a:rPr>
-                        <a:t/>
-                      </a:r>
-                    </a:p>
-                  </a:txBody>
-                  <a:tcPr marL="91440" marR="91440" marT="45720" marB="45720">
-                    <a:solidFill>
-                      <a:srgbClr val="FFF3E8"/>
+                      <a:srgbClr val="FFFFFF"/>
                     </a:solidFill>
                   </a:tcPr>
                 </a:tc>
@@ -4016,55 +3920,31 @@
                     <a:lstStyle/>
                     <a:p>
                       <a:r>
-                        <a:rPr sz="1200" b="0">
-                          <a:solidFill>
-                            <a:srgbClr val="233746"/>
-                          </a:solidFill>
-                          <a:latin typeface="Arial"/>
-                          <a:ea typeface="Arial"/>
-                          <a:cs typeface="Arial"/>
-                        </a:rPr>
-                        <a:t>Implementación del prototipo</a:t>
-                      </a:r>
-                    </a:p>
-                  </a:txBody>
-                  <a:tcPr marL="91440" marR="91440" marT="45720" marB="45720">
-                    <a:solidFill>
-                      <a:srgbClr val="FFFFFF"/>
-                    </a:solidFill>
-                  </a:tcPr>
-                </a:tc>
-                <a:tc>
-                  <a:txBody>
-                    <a:bodyPr/>
-                    <a:lstStyle/>
-                    <a:p>
-                      <a:r>
-                        <a:rPr sz="1200" b="0">
-                          <a:solidFill>
-                            <a:srgbClr val="233746"/>
-                          </a:solidFill>
-                          <a:latin typeface="Arial"/>
-                          <a:ea typeface="Arial"/>
-                          <a:cs typeface="Arial"/>
-                        </a:rPr>
-                        <a:t>A y B</a:t>
-                      </a:r>
-                    </a:p>
-                  </a:txBody>
-                  <a:tcPr marL="91440" marR="91440" marT="45720" marB="45720">
-                    <a:solidFill>
-                      <a:srgbClr val="FFFFFF"/>
-                    </a:solidFill>
-                  </a:tcPr>
-                </a:tc>
-                <a:tc>
-                  <a:txBody>
-                    <a:bodyPr/>
-                    <a:lstStyle/>
-                    <a:p>
-                      <a:r>
-                        <a:rPr sz="1200" b="0">
+                        <a:rPr sz="1200" b="1">
+                          <a:solidFill>
+                            <a:srgbClr val="233746"/>
+                          </a:solidFill>
+                          <a:latin typeface="Arial"/>
+                          <a:ea typeface="Arial"/>
+                          <a:cs typeface="Arial"/>
+                        </a:rPr>
+                        <a:t>Incremento 2 · Entrega final</a:t>
+                      </a:r>
+                    </a:p>
+                  </a:txBody>
+                  <a:tcPr marL="91440" marR="91440" marT="45720" marB="45720">
+                    <a:solidFill>
+                      <a:srgbClr val="FFF3E8"/>
+                    </a:solidFill>
+                  </a:tcPr>
+                </a:tc>
+                <a:tc>
+                  <a:txBody>
+                    <a:bodyPr/>
+                    <a:lstStyle/>
+                    <a:p>
+                      <a:r>
+                        <a:rPr sz="1200" b="1">
                           <a:solidFill>
                             <a:srgbClr val="233746"/>
                           </a:solidFill>
@@ -4078,17 +3958,17 @@
                   </a:txBody>
                   <a:tcPr marL="91440" marR="91440" marT="45720" marB="45720">
                     <a:solidFill>
-                      <a:srgbClr val="FFFFFF"/>
-                    </a:solidFill>
-                  </a:tcPr>
-                </a:tc>
-                <a:tc>
-                  <a:txBody>
-                    <a:bodyPr/>
-                    <a:lstStyle/>
-                    <a:p>
-                      <a:r>
-                        <a:rPr sz="1200" b="0">
+                      <a:srgbClr val="FFF3E8"/>
+                    </a:solidFill>
+                  </a:tcPr>
+                </a:tc>
+                <a:tc>
+                  <a:txBody>
+                    <a:bodyPr/>
+                    <a:lstStyle/>
+                    <a:p>
+                      <a:r>
+                        <a:rPr sz="1200" b="1">
                           <a:solidFill>
                             <a:srgbClr val="233746"/>
                           </a:solidFill>
@@ -4102,17 +3982,17 @@
                   </a:txBody>
                   <a:tcPr marL="91440" marR="91440" marT="45720" marB="45720">
                     <a:solidFill>
-                      <a:srgbClr val="FFFFFF"/>
-                    </a:solidFill>
-                  </a:tcPr>
-                </a:tc>
-                <a:tc>
-                  <a:txBody>
-                    <a:bodyPr/>
-                    <a:lstStyle/>
-                    <a:p>
-                      <a:r>
-                        <a:rPr sz="1200" b="0">
+                      <a:srgbClr val="FFF3E8"/>
+                    </a:solidFill>
+                  </a:tcPr>
+                </a:tc>
+                <a:tc>
+                  <a:txBody>
+                    <a:bodyPr/>
+                    <a:lstStyle/>
+                    <a:p>
+                      <a:r>
+                        <a:rPr sz="1200" b="1">
                           <a:solidFill>
                             <a:srgbClr val="233746"/>
                           </a:solidFill>
@@ -4126,17 +4006,17 @@
                   </a:txBody>
                   <a:tcPr marL="91440" marR="91440" marT="45720" marB="45720">
                     <a:solidFill>
-                      <a:srgbClr val="FFFFFF"/>
-                    </a:solidFill>
-                  </a:tcPr>
-                </a:tc>
-                <a:tc>
-                  <a:txBody>
-                    <a:bodyPr/>
-                    <a:lstStyle/>
-                    <a:p>
-                      <a:r>
-                        <a:rPr sz="1200" b="0">
+                      <a:srgbClr val="FFF3E8"/>
+                    </a:solidFill>
+                  </a:tcPr>
+                </a:tc>
+                <a:tc>
+                  <a:txBody>
+                    <a:bodyPr/>
+                    <a:lstStyle/>
+                    <a:p>
+                      <a:r>
+                        <a:rPr sz="1200" b="1">
                           <a:solidFill>
                             <a:srgbClr val="233746"/>
                           </a:solidFill>
@@ -4150,17 +4030,17 @@
                   </a:txBody>
                   <a:tcPr marL="91440" marR="91440" marT="45720" marB="45720">
                     <a:solidFill>
-                      <a:srgbClr val="D96B18"/>
-                    </a:solidFill>
-                  </a:tcPr>
-                </a:tc>
-                <a:tc>
-                  <a:txBody>
-                    <a:bodyPr/>
-                    <a:lstStyle/>
-                    <a:p>
-                      <a:r>
-                        <a:rPr sz="1200" b="0">
+                      <a:srgbClr val="FFF3E8"/>
+                    </a:solidFill>
+                  </a:tcPr>
+                </a:tc>
+                <a:tc>
+                  <a:txBody>
+                    <a:bodyPr/>
+                    <a:lstStyle/>
+                    <a:p>
+                      <a:r>
+                        <a:rPr sz="1200" b="1">
                           <a:solidFill>
                             <a:srgbClr val="233746"/>
                           </a:solidFill>
@@ -4174,17 +4054,17 @@
                   </a:txBody>
                   <a:tcPr marL="91440" marR="91440" marT="45720" marB="45720">
                     <a:solidFill>
-                      <a:srgbClr val="D96B18"/>
-                    </a:solidFill>
-                  </a:tcPr>
-                </a:tc>
-                <a:tc>
-                  <a:txBody>
-                    <a:bodyPr/>
-                    <a:lstStyle/>
-                    <a:p>
-                      <a:r>
-                        <a:rPr sz="1200" b="0">
+                      <a:srgbClr val="FFF3E8"/>
+                    </a:solidFill>
+                  </a:tcPr>
+                </a:tc>
+                <a:tc>
+                  <a:txBody>
+                    <a:bodyPr/>
+                    <a:lstStyle/>
+                    <a:p>
+                      <a:r>
+                        <a:rPr sz="1200" b="1">
                           <a:solidFill>
                             <a:srgbClr val="233746"/>
                           </a:solidFill>
@@ -4198,41 +4078,17 @@
                   </a:txBody>
                   <a:tcPr marL="91440" marR="91440" marT="45720" marB="45720">
                     <a:solidFill>
-                      <a:srgbClr val="D96B18"/>
-                    </a:solidFill>
-                  </a:tcPr>
-                </a:tc>
-                <a:tc>
-                  <a:txBody>
-                    <a:bodyPr/>
-                    <a:lstStyle/>
-                    <a:p>
-                      <a:r>
-                        <a:rPr sz="1350" b="1">
-                          <a:solidFill>
-                            <a:srgbClr val="2162A0"/>
-                          </a:solidFill>
-                          <a:latin typeface="Arial"/>
-                          <a:ea typeface="Arial"/>
-                          <a:cs typeface="Arial"/>
-                        </a:rPr>
-                        <a:t>●</a:t>
-                      </a:r>
-                    </a:p>
-                  </a:txBody>
-                  <a:tcPr marL="91440" marR="91440" marT="45720" marB="45720">
-                    <a:solidFill>
-                      <a:srgbClr val="E8F1FA"/>
-                    </a:solidFill>
-                  </a:tcPr>
-                </a:tc>
-                <a:tc>
-                  <a:txBody>
-                    <a:bodyPr/>
-                    <a:lstStyle/>
-                    <a:p>
-                      <a:r>
-                        <a:rPr sz="1200" b="0">
+                      <a:srgbClr val="FFF3E8"/>
+                    </a:solidFill>
+                  </a:tcPr>
+                </a:tc>
+                <a:tc>
+                  <a:txBody>
+                    <a:bodyPr/>
+                    <a:lstStyle/>
+                    <a:p>
+                      <a:r>
+                        <a:rPr sz="1200" b="1">
                           <a:solidFill>
                             <a:srgbClr val="233746"/>
                           </a:solidFill>
@@ -4246,17 +4102,17 @@
                   </a:txBody>
                   <a:tcPr marL="91440" marR="91440" marT="45720" marB="45720">
                     <a:solidFill>
-                      <a:srgbClr val="FFFFFF"/>
-                    </a:solidFill>
-                  </a:tcPr>
-                </a:tc>
-                <a:tc>
-                  <a:txBody>
-                    <a:bodyPr/>
-                    <a:lstStyle/>
-                    <a:p>
-                      <a:r>
-                        <a:rPr sz="1200" b="0">
+                      <a:srgbClr val="E8AD7C"/>
+                    </a:solidFill>
+                  </a:tcPr>
+                </a:tc>
+                <a:tc>
+                  <a:txBody>
+                    <a:bodyPr/>
+                    <a:lstStyle/>
+                    <a:p>
+                      <a:r>
+                        <a:rPr sz="1200" b="1">
                           <a:solidFill>
                             <a:srgbClr val="233746"/>
                           </a:solidFill>
@@ -4270,17 +4126,17 @@
                   </a:txBody>
                   <a:tcPr marL="91440" marR="91440" marT="45720" marB="45720">
                     <a:solidFill>
-                      <a:srgbClr val="FFFFFF"/>
-                    </a:solidFill>
-                  </a:tcPr>
-                </a:tc>
-                <a:tc>
-                  <a:txBody>
-                    <a:bodyPr/>
-                    <a:lstStyle/>
-                    <a:p>
-                      <a:r>
-                        <a:rPr sz="1200" b="0">
+                      <a:srgbClr val="E8AD7C"/>
+                    </a:solidFill>
+                  </a:tcPr>
+                </a:tc>
+                <a:tc>
+                  <a:txBody>
+                    <a:bodyPr/>
+                    <a:lstStyle/>
+                    <a:p>
+                      <a:r>
+                        <a:rPr sz="1200" b="1">
                           <a:solidFill>
                             <a:srgbClr val="233746"/>
                           </a:solidFill>
@@ -4294,17 +4150,17 @@
                   </a:txBody>
                   <a:tcPr marL="91440" marR="91440" marT="45720" marB="45720">
                     <a:solidFill>
-                      <a:srgbClr val="FFFFFF"/>
-                    </a:solidFill>
-                  </a:tcPr>
-                </a:tc>
-                <a:tc>
-                  <a:txBody>
-                    <a:bodyPr/>
-                    <a:lstStyle/>
-                    <a:p>
-                      <a:r>
-                        <a:rPr sz="1200" b="0">
+                      <a:srgbClr val="E8AD7C"/>
+                    </a:solidFill>
+                  </a:tcPr>
+                </a:tc>
+                <a:tc>
+                  <a:txBody>
+                    <a:bodyPr/>
+                    <a:lstStyle/>
+                    <a:p>
+                      <a:r>
+                        <a:rPr sz="1200" b="1">
                           <a:solidFill>
                             <a:srgbClr val="233746"/>
                           </a:solidFill>
@@ -4318,17 +4174,17 @@
                   </a:txBody>
                   <a:tcPr marL="91440" marR="91440" marT="45720" marB="45720">
                     <a:solidFill>
-                      <a:srgbClr val="FFFFFF"/>
-                    </a:solidFill>
-                  </a:tcPr>
-                </a:tc>
-                <a:tc>
-                  <a:txBody>
-                    <a:bodyPr/>
-                    <a:lstStyle/>
-                    <a:p>
-                      <a:r>
-                        <a:rPr sz="1200" b="0">
+                      <a:srgbClr val="E8AD7C"/>
+                    </a:solidFill>
+                  </a:tcPr>
+                </a:tc>
+                <a:tc>
+                  <a:txBody>
+                    <a:bodyPr/>
+                    <a:lstStyle/>
+                    <a:p>
+                      <a:r>
+                        <a:rPr sz="1200" b="1">
                           <a:solidFill>
                             <a:srgbClr val="233746"/>
                           </a:solidFill>
@@ -4342,7 +4198,31 @@
                   </a:txBody>
                   <a:tcPr marL="91440" marR="91440" marT="45720" marB="45720">
                     <a:solidFill>
-                      <a:srgbClr val="FFFFFF"/>
+                      <a:srgbClr val="FFF3E8"/>
+                    </a:solidFill>
+                  </a:tcPr>
+                </a:tc>
+                <a:tc>
+                  <a:txBody>
+                    <a:bodyPr/>
+                    <a:lstStyle/>
+                    <a:p>
+                      <a:r>
+                        <a:rPr sz="1200" b="1">
+                          <a:solidFill>
+                            <a:srgbClr val="233746"/>
+                          </a:solidFill>
+                          <a:latin typeface="Arial"/>
+                          <a:ea typeface="Arial"/>
+                          <a:cs typeface="Arial"/>
+                        </a:rPr>
+                        <a:t/>
+                      </a:r>
+                    </a:p>
+                  </a:txBody>
+                  <a:tcPr marL="91440" marR="91440" marT="45720" marB="45720">
+                    <a:solidFill>
+                      <a:srgbClr val="FFF3E8"/>
                     </a:solidFill>
                   </a:tcPr>
                 </a:tc>
@@ -4354,31 +4234,55 @@
                     <a:lstStyle/>
                     <a:p>
                       <a:r>
-                        <a:rPr sz="1200" b="1">
-                          <a:solidFill>
-                            <a:srgbClr val="233746"/>
-                          </a:solidFill>
-                          <a:latin typeface="Arial"/>
-                          <a:ea typeface="Arial"/>
-                          <a:cs typeface="Arial"/>
-                        </a:rPr>
-                        <a:t>Incremento 2 · Entrega final</a:t>
-                      </a:r>
-                    </a:p>
-                  </a:txBody>
-                  <a:tcPr marL="91440" marR="91440" marT="45720" marB="45720">
-                    <a:solidFill>
-                      <a:srgbClr val="FFF3E8"/>
-                    </a:solidFill>
-                  </a:tcPr>
-                </a:tc>
-                <a:tc>
-                  <a:txBody>
-                    <a:bodyPr/>
-                    <a:lstStyle/>
-                    <a:p>
-                      <a:r>
-                        <a:rPr sz="1200" b="1">
+                        <a:rPr sz="1200" b="0">
+                          <a:solidFill>
+                            <a:srgbClr val="233746"/>
+                          </a:solidFill>
+                          <a:latin typeface="Arial"/>
+                          <a:ea typeface="Arial"/>
+                          <a:cs typeface="Arial"/>
+                        </a:rPr>
+                        <a:t>Implementación final</a:t>
+                      </a:r>
+                    </a:p>
+                  </a:txBody>
+                  <a:tcPr marL="91440" marR="91440" marT="45720" marB="45720">
+                    <a:solidFill>
+                      <a:srgbClr val="FFFFFF"/>
+                    </a:solidFill>
+                  </a:tcPr>
+                </a:tc>
+                <a:tc>
+                  <a:txBody>
+                    <a:bodyPr/>
+                    <a:lstStyle/>
+                    <a:p>
+                      <a:r>
+                        <a:rPr sz="1200" b="0">
+                          <a:solidFill>
+                            <a:srgbClr val="233746"/>
+                          </a:solidFill>
+                          <a:latin typeface="Arial"/>
+                          <a:ea typeface="Arial"/>
+                          <a:cs typeface="Arial"/>
+                        </a:rPr>
+                        <a:t>A y B</a:t>
+                      </a:r>
+                    </a:p>
+                  </a:txBody>
+                  <a:tcPr marL="91440" marR="91440" marT="45720" marB="45720">
+                    <a:solidFill>
+                      <a:srgbClr val="FFFFFF"/>
+                    </a:solidFill>
+                  </a:tcPr>
+                </a:tc>
+                <a:tc>
+                  <a:txBody>
+                    <a:bodyPr/>
+                    <a:lstStyle/>
+                    <a:p>
+                      <a:r>
+                        <a:rPr sz="1200" b="0">
                           <a:solidFill>
                             <a:srgbClr val="233746"/>
                           </a:solidFill>
@@ -4392,17 +4296,17 @@
                   </a:txBody>
                   <a:tcPr marL="91440" marR="91440" marT="45720" marB="45720">
                     <a:solidFill>
-                      <a:srgbClr val="FFF3E8"/>
-                    </a:solidFill>
-                  </a:tcPr>
-                </a:tc>
-                <a:tc>
-                  <a:txBody>
-                    <a:bodyPr/>
-                    <a:lstStyle/>
-                    <a:p>
-                      <a:r>
-                        <a:rPr sz="1200" b="1">
+                      <a:srgbClr val="FFFFFF"/>
+                    </a:solidFill>
+                  </a:tcPr>
+                </a:tc>
+                <a:tc>
+                  <a:txBody>
+                    <a:bodyPr/>
+                    <a:lstStyle/>
+                    <a:p>
+                      <a:r>
+                        <a:rPr sz="1200" b="0">
                           <a:solidFill>
                             <a:srgbClr val="233746"/>
                           </a:solidFill>
@@ -4416,17 +4320,17 @@
                   </a:txBody>
                   <a:tcPr marL="91440" marR="91440" marT="45720" marB="45720">
                     <a:solidFill>
-                      <a:srgbClr val="FFF3E8"/>
-                    </a:solidFill>
-                  </a:tcPr>
-                </a:tc>
-                <a:tc>
-                  <a:txBody>
-                    <a:bodyPr/>
-                    <a:lstStyle/>
-                    <a:p>
-                      <a:r>
-                        <a:rPr sz="1200" b="1">
+                      <a:srgbClr val="FFFFFF"/>
+                    </a:solidFill>
+                  </a:tcPr>
+                </a:tc>
+                <a:tc>
+                  <a:txBody>
+                    <a:bodyPr/>
+                    <a:lstStyle/>
+                    <a:p>
+                      <a:r>
+                        <a:rPr sz="1200" b="0">
                           <a:solidFill>
                             <a:srgbClr val="233746"/>
                           </a:solidFill>
@@ -4440,17 +4344,17 @@
                   </a:txBody>
                   <a:tcPr marL="91440" marR="91440" marT="45720" marB="45720">
                     <a:solidFill>
-                      <a:srgbClr val="FFF3E8"/>
-                    </a:solidFill>
-                  </a:tcPr>
-                </a:tc>
-                <a:tc>
-                  <a:txBody>
-                    <a:bodyPr/>
-                    <a:lstStyle/>
-                    <a:p>
-                      <a:r>
-                        <a:rPr sz="1200" b="1">
+                      <a:srgbClr val="FFFFFF"/>
+                    </a:solidFill>
+                  </a:tcPr>
+                </a:tc>
+                <a:tc>
+                  <a:txBody>
+                    <a:bodyPr/>
+                    <a:lstStyle/>
+                    <a:p>
+                      <a:r>
+                        <a:rPr sz="1200" b="0">
                           <a:solidFill>
                             <a:srgbClr val="233746"/>
                           </a:solidFill>
@@ -4464,17 +4368,17 @@
                   </a:txBody>
                   <a:tcPr marL="91440" marR="91440" marT="45720" marB="45720">
                     <a:solidFill>
-                      <a:srgbClr val="FFF3E8"/>
-                    </a:solidFill>
-                  </a:tcPr>
-                </a:tc>
-                <a:tc>
-                  <a:txBody>
-                    <a:bodyPr/>
-                    <a:lstStyle/>
-                    <a:p>
-                      <a:r>
-                        <a:rPr sz="1200" b="1">
+                      <a:srgbClr val="FFFFFF"/>
+                    </a:solidFill>
+                  </a:tcPr>
+                </a:tc>
+                <a:tc>
+                  <a:txBody>
+                    <a:bodyPr/>
+                    <a:lstStyle/>
+                    <a:p>
+                      <a:r>
+                        <a:rPr sz="1200" b="0">
                           <a:solidFill>
                             <a:srgbClr val="233746"/>
                           </a:solidFill>
@@ -4488,17 +4392,17 @@
                   </a:txBody>
                   <a:tcPr marL="91440" marR="91440" marT="45720" marB="45720">
                     <a:solidFill>
-                      <a:srgbClr val="FFF3E8"/>
-                    </a:solidFill>
-                  </a:tcPr>
-                </a:tc>
-                <a:tc>
-                  <a:txBody>
-                    <a:bodyPr/>
-                    <a:lstStyle/>
-                    <a:p>
-                      <a:r>
-                        <a:rPr sz="1200" b="1">
+                      <a:srgbClr val="FFFFFF"/>
+                    </a:solidFill>
+                  </a:tcPr>
+                </a:tc>
+                <a:tc>
+                  <a:txBody>
+                    <a:bodyPr/>
+                    <a:lstStyle/>
+                    <a:p>
+                      <a:r>
+                        <a:rPr sz="1200" b="0">
                           <a:solidFill>
                             <a:srgbClr val="233746"/>
                           </a:solidFill>
@@ -4512,17 +4416,17 @@
                   </a:txBody>
                   <a:tcPr marL="91440" marR="91440" marT="45720" marB="45720">
                     <a:solidFill>
-                      <a:srgbClr val="FFF3E8"/>
-                    </a:solidFill>
-                  </a:tcPr>
-                </a:tc>
-                <a:tc>
-                  <a:txBody>
-                    <a:bodyPr/>
-                    <a:lstStyle/>
-                    <a:p>
-                      <a:r>
-                        <a:rPr sz="1200" b="1">
+                      <a:srgbClr val="D96B18"/>
+                    </a:solidFill>
+                  </a:tcPr>
+                </a:tc>
+                <a:tc>
+                  <a:txBody>
+                    <a:bodyPr/>
+                    <a:lstStyle/>
+                    <a:p>
+                      <a:r>
+                        <a:rPr sz="1200" b="0">
                           <a:solidFill>
                             <a:srgbClr val="233746"/>
                           </a:solidFill>
@@ -4536,17 +4440,17 @@
                   </a:txBody>
                   <a:tcPr marL="91440" marR="91440" marT="45720" marB="45720">
                     <a:solidFill>
-                      <a:srgbClr val="FFF3E8"/>
-                    </a:solidFill>
-                  </a:tcPr>
-                </a:tc>
-                <a:tc>
-                  <a:txBody>
-                    <a:bodyPr/>
-                    <a:lstStyle/>
-                    <a:p>
-                      <a:r>
-                        <a:rPr sz="1200" b="1">
+                      <a:srgbClr val="D96B18"/>
+                    </a:solidFill>
+                  </a:tcPr>
+                </a:tc>
+                <a:tc>
+                  <a:txBody>
+                    <a:bodyPr/>
+                    <a:lstStyle/>
+                    <a:p>
+                      <a:r>
+                        <a:rPr sz="1200" b="0">
                           <a:solidFill>
                             <a:srgbClr val="233746"/>
                           </a:solidFill>
@@ -4560,17 +4464,17 @@
                   </a:txBody>
                   <a:tcPr marL="91440" marR="91440" marT="45720" marB="45720">
                     <a:solidFill>
-                      <a:srgbClr val="E8AD7C"/>
-                    </a:solidFill>
-                  </a:tcPr>
-                </a:tc>
-                <a:tc>
-                  <a:txBody>
-                    <a:bodyPr/>
-                    <a:lstStyle/>
-                    <a:p>
-                      <a:r>
-                        <a:rPr sz="1200" b="1">
+                      <a:srgbClr val="D96B18"/>
+                    </a:solidFill>
+                  </a:tcPr>
+                </a:tc>
+                <a:tc>
+                  <a:txBody>
+                    <a:bodyPr/>
+                    <a:lstStyle/>
+                    <a:p>
+                      <a:r>
+                        <a:rPr sz="1200" b="0">
                           <a:solidFill>
                             <a:srgbClr val="233746"/>
                           </a:solidFill>
@@ -4584,17 +4488,17 @@
                   </a:txBody>
                   <a:tcPr marL="91440" marR="91440" marT="45720" marB="45720">
                     <a:solidFill>
-                      <a:srgbClr val="E8AD7C"/>
-                    </a:solidFill>
-                  </a:tcPr>
-                </a:tc>
-                <a:tc>
-                  <a:txBody>
-                    <a:bodyPr/>
-                    <a:lstStyle/>
-                    <a:p>
-                      <a:r>
-                        <a:rPr sz="1200" b="1">
+                      <a:srgbClr val="D96B18"/>
+                    </a:solidFill>
+                  </a:tcPr>
+                </a:tc>
+                <a:tc>
+                  <a:txBody>
+                    <a:bodyPr/>
+                    <a:lstStyle/>
+                    <a:p>
+                      <a:r>
+                        <a:rPr sz="1200" b="0">
                           <a:solidFill>
                             <a:srgbClr val="233746"/>
                           </a:solidFill>
@@ -4608,17 +4512,17 @@
                   </a:txBody>
                   <a:tcPr marL="91440" marR="91440" marT="45720" marB="45720">
                     <a:solidFill>
-                      <a:srgbClr val="E8AD7C"/>
-                    </a:solidFill>
-                  </a:tcPr>
-                </a:tc>
-                <a:tc>
-                  <a:txBody>
-                    <a:bodyPr/>
-                    <a:lstStyle/>
-                    <a:p>
-                      <a:r>
-                        <a:rPr sz="1200" b="1">
+                      <a:srgbClr val="FFFFFF"/>
+                    </a:solidFill>
+                  </a:tcPr>
+                </a:tc>
+                <a:tc>
+                  <a:txBody>
+                    <a:bodyPr/>
+                    <a:lstStyle/>
+                    <a:p>
+                      <a:r>
+                        <a:rPr sz="1200" b="0">
                           <a:solidFill>
                             <a:srgbClr val="233746"/>
                           </a:solidFill>
@@ -4632,55 +4536,7 @@
                   </a:txBody>
                   <a:tcPr marL="91440" marR="91440" marT="45720" marB="45720">
                     <a:solidFill>
-                      <a:srgbClr val="E8AD7C"/>
-                    </a:solidFill>
-                  </a:tcPr>
-                </a:tc>
-                <a:tc>
-                  <a:txBody>
-                    <a:bodyPr/>
-                    <a:lstStyle/>
-                    <a:p>
-                      <a:r>
-                        <a:rPr sz="1200" b="1">
-                          <a:solidFill>
-                            <a:srgbClr val="233746"/>
-                          </a:solidFill>
-                          <a:latin typeface="Arial"/>
-                          <a:ea typeface="Arial"/>
-                          <a:cs typeface="Arial"/>
-                        </a:rPr>
-                        <a:t/>
-                      </a:r>
-                    </a:p>
-                  </a:txBody>
-                  <a:tcPr marL="91440" marR="91440" marT="45720" marB="45720">
-                    <a:solidFill>
-                      <a:srgbClr val="FFF3E8"/>
-                    </a:solidFill>
-                  </a:tcPr>
-                </a:tc>
-                <a:tc>
-                  <a:txBody>
-                    <a:bodyPr/>
-                    <a:lstStyle/>
-                    <a:p>
-                      <a:r>
-                        <a:rPr sz="1200" b="1">
-                          <a:solidFill>
-                            <a:srgbClr val="233746"/>
-                          </a:solidFill>
-                          <a:latin typeface="Arial"/>
-                          <a:ea typeface="Arial"/>
-                          <a:cs typeface="Arial"/>
-                        </a:rPr>
-                        <a:t/>
-                      </a:r>
-                    </a:p>
-                  </a:txBody>
-                  <a:tcPr marL="91440" marR="91440" marT="45720" marB="45720">
-                    <a:solidFill>
-                      <a:srgbClr val="FFF3E8"/>
+                      <a:srgbClr val="FFFFFF"/>
                     </a:solidFill>
                   </a:tcPr>
                 </a:tc>
@@ -4700,13 +4556,13 @@
                           <a:ea typeface="Arial"/>
                           <a:cs typeface="Arial"/>
                         </a:rPr>
-                        <a:t>Implementación final</a:t>
-                      </a:r>
-                    </a:p>
-                  </a:txBody>
-                  <a:tcPr marL="91440" marR="91440" marT="45720" marB="45720">
-                    <a:solidFill>
-                      <a:srgbClr val="FFFFFF"/>
+                        <a:t>Pruebas y correcciones</a:t>
+                      </a:r>
+                    </a:p>
+                  </a:txBody>
+                  <a:tcPr marL="91440" marR="91440" marT="45720" marB="45720">
+                    <a:solidFill>
+                      <a:srgbClr val="FFF3E8"/>
                     </a:solidFill>
                   </a:tcPr>
                 </a:tc>
@@ -4730,7 +4586,7 @@
                   </a:txBody>
                   <a:tcPr marL="91440" marR="91440" marT="45720" marB="45720">
                     <a:solidFill>
-                      <a:srgbClr val="FFFFFF"/>
+                      <a:srgbClr val="FFF3E8"/>
                     </a:solidFill>
                   </a:tcPr>
                 </a:tc>
@@ -4754,7 +4610,7 @@
                   </a:txBody>
                   <a:tcPr marL="91440" marR="91440" marT="45720" marB="45720">
                     <a:solidFill>
-                      <a:srgbClr val="FFFFFF"/>
+                      <a:srgbClr val="FFF3E8"/>
                     </a:solidFill>
                   </a:tcPr>
                 </a:tc>
@@ -4778,7 +4634,7 @@
                   </a:txBody>
                   <a:tcPr marL="91440" marR="91440" marT="45720" marB="45720">
                     <a:solidFill>
-                      <a:srgbClr val="FFFFFF"/>
+                      <a:srgbClr val="FFF3E8"/>
                     </a:solidFill>
                   </a:tcPr>
                 </a:tc>
@@ -4802,7 +4658,7 @@
                   </a:txBody>
                   <a:tcPr marL="91440" marR="91440" marT="45720" marB="45720">
                     <a:solidFill>
-                      <a:srgbClr val="FFFFFF"/>
+                      <a:srgbClr val="D96B18"/>
                     </a:solidFill>
                   </a:tcPr>
                 </a:tc>
@@ -4826,7 +4682,7 @@
                   </a:txBody>
                   <a:tcPr marL="91440" marR="91440" marT="45720" marB="45720">
                     <a:solidFill>
-                      <a:srgbClr val="FFFFFF"/>
+                      <a:srgbClr val="D96B18"/>
                     </a:solidFill>
                   </a:tcPr>
                 </a:tc>
@@ -4850,7 +4706,7 @@
                   </a:txBody>
                   <a:tcPr marL="91440" marR="91440" marT="45720" marB="45720">
                     <a:solidFill>
-                      <a:srgbClr val="FFFFFF"/>
+                      <a:srgbClr val="D96B18"/>
                     </a:solidFill>
                   </a:tcPr>
                 </a:tc>
@@ -4874,7 +4730,7 @@
                   </a:txBody>
                   <a:tcPr marL="91440" marR="91440" marT="45720" marB="45720">
                     <a:solidFill>
-                      <a:srgbClr val="FFFFFF"/>
+                      <a:srgbClr val="D96B18"/>
                     </a:solidFill>
                   </a:tcPr>
                 </a:tc>
@@ -4970,7 +4826,7 @@
                   </a:txBody>
                   <a:tcPr marL="91440" marR="91440" marT="45720" marB="45720">
                     <a:solidFill>
-                      <a:srgbClr val="D96B18"/>
+                      <a:srgbClr val="FFF3E8"/>
                     </a:solidFill>
                   </a:tcPr>
                 </a:tc>
@@ -4994,31 +4850,7 @@
                   </a:txBody>
                   <a:tcPr marL="91440" marR="91440" marT="45720" marB="45720">
                     <a:solidFill>
-                      <a:srgbClr val="FFFFFF"/>
-                    </a:solidFill>
-                  </a:tcPr>
-                </a:tc>
-                <a:tc>
-                  <a:txBody>
-                    <a:bodyPr/>
-                    <a:lstStyle/>
-                    <a:p>
-                      <a:r>
-                        <a:rPr sz="1200" b="0">
-                          <a:solidFill>
-                            <a:srgbClr val="233746"/>
-                          </a:solidFill>
-                          <a:latin typeface="Arial"/>
-                          <a:ea typeface="Arial"/>
-                          <a:cs typeface="Arial"/>
-                        </a:rPr>
-                        <a:t/>
-                      </a:r>
-                    </a:p>
-                  </a:txBody>
-                  <a:tcPr marL="91440" marR="91440" marT="45720" marB="45720">
-                    <a:solidFill>
-                      <a:srgbClr val="FFFFFF"/>
+                      <a:srgbClr val="FFF3E8"/>
                     </a:solidFill>
                   </a:tcPr>
                 </a:tc>
@@ -5038,13 +4870,13 @@
                           <a:ea typeface="Arial"/>
                           <a:cs typeface="Arial"/>
                         </a:rPr>
-                        <a:t>Pruebas y correcciones</a:t>
-                      </a:r>
-                    </a:p>
-                  </a:txBody>
-                  <a:tcPr marL="91440" marR="91440" marT="45720" marB="45720">
-                    <a:solidFill>
-                      <a:srgbClr val="FFF3E8"/>
+                        <a:t>Memoria</a:t>
+                      </a:r>
+                    </a:p>
+                  </a:txBody>
+                  <a:tcPr marL="91440" marR="91440" marT="45720" marB="45720">
+                    <a:solidFill>
+                      <a:srgbClr val="FFFFFF"/>
                     </a:solidFill>
                   </a:tcPr>
                 </a:tc>
@@ -5068,7 +4900,7 @@
                   </a:txBody>
                   <a:tcPr marL="91440" marR="91440" marT="45720" marB="45720">
                     <a:solidFill>
-                      <a:srgbClr val="FFF3E8"/>
+                      <a:srgbClr val="FFFFFF"/>
                     </a:solidFill>
                   </a:tcPr>
                 </a:tc>
@@ -5092,7 +4924,7 @@
                   </a:txBody>
                   <a:tcPr marL="91440" marR="91440" marT="45720" marB="45720">
                     <a:solidFill>
-                      <a:srgbClr val="FFF3E8"/>
+                      <a:srgbClr val="D96B18"/>
                     </a:solidFill>
                   </a:tcPr>
                 </a:tc>
@@ -5116,7 +4948,7 @@
                   </a:txBody>
                   <a:tcPr marL="91440" marR="91440" marT="45720" marB="45720">
                     <a:solidFill>
-                      <a:srgbClr val="FFF3E8"/>
+                      <a:srgbClr val="D96B18"/>
                     </a:solidFill>
                   </a:tcPr>
                 </a:tc>
@@ -5140,7 +4972,7 @@
                   </a:txBody>
                   <a:tcPr marL="91440" marR="91440" marT="45720" marB="45720">
                     <a:solidFill>
-                      <a:srgbClr val="FFF3E8"/>
+                      <a:srgbClr val="D96B18"/>
                     </a:solidFill>
                   </a:tcPr>
                 </a:tc>
@@ -5222,6 +5054,30 @@
                     <a:lstStyle/>
                     <a:p>
                       <a:r>
+                        <a:rPr sz="1350" b="1">
+                          <a:solidFill>
+                            <a:srgbClr val="2162A0"/>
+                          </a:solidFill>
+                          <a:latin typeface="Arial"/>
+                          <a:ea typeface="Arial"/>
+                          <a:cs typeface="Arial"/>
+                        </a:rPr>
+                        <a:t>●</a:t>
+                      </a:r>
+                    </a:p>
+                  </a:txBody>
+                  <a:tcPr marL="91440" marR="91440" marT="45720" marB="45720">
+                    <a:solidFill>
+                      <a:srgbClr val="F4BA87"/>
+                    </a:solidFill>
+                  </a:tcPr>
+                </a:tc>
+                <a:tc>
+                  <a:txBody>
+                    <a:bodyPr/>
+                    <a:lstStyle/>
+                    <a:p>
+                      <a:r>
                         <a:rPr sz="1200" b="0">
                           <a:solidFill>
                             <a:srgbClr val="233746"/>
@@ -5284,7 +5140,7 @@
                   </a:txBody>
                   <a:tcPr marL="91440" marR="91440" marT="45720" marB="45720">
                     <a:solidFill>
-                      <a:srgbClr val="D96B18"/>
+                      <a:srgbClr val="FFFFFF"/>
                     </a:solidFill>
                   </a:tcPr>
                 </a:tc>
@@ -5308,55 +5164,7 @@
                   </a:txBody>
                   <a:tcPr marL="91440" marR="91440" marT="45720" marB="45720">
                     <a:solidFill>
-                      <a:srgbClr val="D96B18"/>
-                    </a:solidFill>
-                  </a:tcPr>
-                </a:tc>
-                <a:tc>
-                  <a:txBody>
-                    <a:bodyPr/>
-                    <a:lstStyle/>
-                    <a:p>
-                      <a:r>
-                        <a:rPr sz="1200" b="0">
-                          <a:solidFill>
-                            <a:srgbClr val="233746"/>
-                          </a:solidFill>
-                          <a:latin typeface="Arial"/>
-                          <a:ea typeface="Arial"/>
-                          <a:cs typeface="Arial"/>
-                        </a:rPr>
-                        <a:t/>
-                      </a:r>
-                    </a:p>
-                  </a:txBody>
-                  <a:tcPr marL="91440" marR="91440" marT="45720" marB="45720">
-                    <a:solidFill>
-                      <a:srgbClr val="FFF3E8"/>
-                    </a:solidFill>
-                  </a:tcPr>
-                </a:tc>
-                <a:tc>
-                  <a:txBody>
-                    <a:bodyPr/>
-                    <a:lstStyle/>
-                    <a:p>
-                      <a:r>
-                        <a:rPr sz="1200" b="0">
-                          <a:solidFill>
-                            <a:srgbClr val="233746"/>
-                          </a:solidFill>
-                          <a:latin typeface="Arial"/>
-                          <a:ea typeface="Arial"/>
-                          <a:cs typeface="Arial"/>
-                        </a:rPr>
-                        <a:t/>
-                      </a:r>
-                    </a:p>
-                  </a:txBody>
-                  <a:tcPr marL="91440" marR="91440" marT="45720" marB="45720">
-                    <a:solidFill>
-                      <a:srgbClr val="FFF3E8"/>
+                      <a:srgbClr val="FFFFFF"/>
                     </a:solidFill>
                   </a:tcPr>
                 </a:tc>
@@ -5376,13 +5184,13 @@
                           <a:ea typeface="Arial"/>
                           <a:cs typeface="Arial"/>
                         </a:rPr>
-                        <a:t>Memoria</a:t>
-                      </a:r>
-                    </a:p>
-                  </a:txBody>
-                  <a:tcPr marL="91440" marR="91440" marT="45720" marB="45720">
-                    <a:solidFill>
-                      <a:srgbClr val="FFFFFF"/>
+                        <a:t>Preparación de la defensa</a:t>
+                      </a:r>
+                    </a:p>
+                  </a:txBody>
+                  <a:tcPr marL="91440" marR="91440" marT="45720" marB="45720">
+                    <a:solidFill>
+                      <a:srgbClr val="FFF3E8"/>
                     </a:solidFill>
                   </a:tcPr>
                 </a:tc>
@@ -5401,368 +5209,6 @@
                           <a:cs typeface="Arial"/>
                         </a:rPr>
                         <a:t>A y B</a:t>
-                      </a:r>
-                    </a:p>
-                  </a:txBody>
-                  <a:tcPr marL="91440" marR="91440" marT="45720" marB="45720">
-                    <a:solidFill>
-                      <a:srgbClr val="FFFFFF"/>
-                    </a:solidFill>
-                  </a:tcPr>
-                </a:tc>
-                <a:tc>
-                  <a:txBody>
-                    <a:bodyPr/>
-                    <a:lstStyle/>
-                    <a:p>
-                      <a:r>
-                        <a:rPr sz="1200" b="0">
-                          <a:solidFill>
-                            <a:srgbClr val="233746"/>
-                          </a:solidFill>
-                          <a:latin typeface="Arial"/>
-                          <a:ea typeface="Arial"/>
-                          <a:cs typeface="Arial"/>
-                        </a:rPr>
-                        <a:t/>
-                      </a:r>
-                    </a:p>
-                  </a:txBody>
-                  <a:tcPr marL="91440" marR="91440" marT="45720" marB="45720">
-                    <a:solidFill>
-                      <a:srgbClr val="D96B18"/>
-                    </a:solidFill>
-                  </a:tcPr>
-                </a:tc>
-                <a:tc>
-                  <a:txBody>
-                    <a:bodyPr/>
-                    <a:lstStyle/>
-                    <a:p>
-                      <a:r>
-                        <a:rPr sz="1200" b="0">
-                          <a:solidFill>
-                            <a:srgbClr val="233746"/>
-                          </a:solidFill>
-                          <a:latin typeface="Arial"/>
-                          <a:ea typeface="Arial"/>
-                          <a:cs typeface="Arial"/>
-                        </a:rPr>
-                        <a:t/>
-                      </a:r>
-                    </a:p>
-                  </a:txBody>
-                  <a:tcPr marL="91440" marR="91440" marT="45720" marB="45720">
-                    <a:solidFill>
-                      <a:srgbClr val="D96B18"/>
-                    </a:solidFill>
-                  </a:tcPr>
-                </a:tc>
-                <a:tc>
-                  <a:txBody>
-                    <a:bodyPr/>
-                    <a:lstStyle/>
-                    <a:p>
-                      <a:r>
-                        <a:rPr sz="1200" b="0">
-                          <a:solidFill>
-                            <a:srgbClr val="233746"/>
-                          </a:solidFill>
-                          <a:latin typeface="Arial"/>
-                          <a:ea typeface="Arial"/>
-                          <a:cs typeface="Arial"/>
-                        </a:rPr>
-                        <a:t/>
-                      </a:r>
-                    </a:p>
-                  </a:txBody>
-                  <a:tcPr marL="91440" marR="91440" marT="45720" marB="45720">
-                    <a:solidFill>
-                      <a:srgbClr val="D96B18"/>
-                    </a:solidFill>
-                  </a:tcPr>
-                </a:tc>
-                <a:tc>
-                  <a:txBody>
-                    <a:bodyPr/>
-                    <a:lstStyle/>
-                    <a:p>
-                      <a:r>
-                        <a:rPr sz="1200" b="0">
-                          <a:solidFill>
-                            <a:srgbClr val="233746"/>
-                          </a:solidFill>
-                          <a:latin typeface="Arial"/>
-                          <a:ea typeface="Arial"/>
-                          <a:cs typeface="Arial"/>
-                        </a:rPr>
-                        <a:t/>
-                      </a:r>
-                    </a:p>
-                  </a:txBody>
-                  <a:tcPr marL="91440" marR="91440" marT="45720" marB="45720">
-                    <a:solidFill>
-                      <a:srgbClr val="D96B18"/>
-                    </a:solidFill>
-                  </a:tcPr>
-                </a:tc>
-                <a:tc>
-                  <a:txBody>
-                    <a:bodyPr/>
-                    <a:lstStyle/>
-                    <a:p>
-                      <a:r>
-                        <a:rPr sz="1200" b="0">
-                          <a:solidFill>
-                            <a:srgbClr val="233746"/>
-                          </a:solidFill>
-                          <a:latin typeface="Arial"/>
-                          <a:ea typeface="Arial"/>
-                          <a:cs typeface="Arial"/>
-                        </a:rPr>
-                        <a:t/>
-                      </a:r>
-                    </a:p>
-                  </a:txBody>
-                  <a:tcPr marL="91440" marR="91440" marT="45720" marB="45720">
-                    <a:solidFill>
-                      <a:srgbClr val="D96B18"/>
-                    </a:solidFill>
-                  </a:tcPr>
-                </a:tc>
-                <a:tc>
-                  <a:txBody>
-                    <a:bodyPr/>
-                    <a:lstStyle/>
-                    <a:p>
-                      <a:r>
-                        <a:rPr sz="1200" b="0">
-                          <a:solidFill>
-                            <a:srgbClr val="233746"/>
-                          </a:solidFill>
-                          <a:latin typeface="Arial"/>
-                          <a:ea typeface="Arial"/>
-                          <a:cs typeface="Arial"/>
-                        </a:rPr>
-                        <a:t/>
-                      </a:r>
-                    </a:p>
-                  </a:txBody>
-                  <a:tcPr marL="91440" marR="91440" marT="45720" marB="45720">
-                    <a:solidFill>
-                      <a:srgbClr val="D96B18"/>
-                    </a:solidFill>
-                  </a:tcPr>
-                </a:tc>
-                <a:tc>
-                  <a:txBody>
-                    <a:bodyPr/>
-                    <a:lstStyle/>
-                    <a:p>
-                      <a:r>
-                        <a:rPr sz="1200" b="0">
-                          <a:solidFill>
-                            <a:srgbClr val="233746"/>
-                          </a:solidFill>
-                          <a:latin typeface="Arial"/>
-                          <a:ea typeface="Arial"/>
-                          <a:cs typeface="Arial"/>
-                        </a:rPr>
-                        <a:t/>
-                      </a:r>
-                    </a:p>
-                  </a:txBody>
-                  <a:tcPr marL="91440" marR="91440" marT="45720" marB="45720">
-                    <a:solidFill>
-                      <a:srgbClr val="D96B18"/>
-                    </a:solidFill>
-                  </a:tcPr>
-                </a:tc>
-                <a:tc>
-                  <a:txBody>
-                    <a:bodyPr/>
-                    <a:lstStyle/>
-                    <a:p>
-                      <a:r>
-                        <a:rPr sz="1350" b="1">
-                          <a:solidFill>
-                            <a:srgbClr val="2162A0"/>
-                          </a:solidFill>
-                          <a:latin typeface="Arial"/>
-                          <a:ea typeface="Arial"/>
-                          <a:cs typeface="Arial"/>
-                        </a:rPr>
-                        <a:t>●</a:t>
-                      </a:r>
-                    </a:p>
-                  </a:txBody>
-                  <a:tcPr marL="91440" marR="91440" marT="45720" marB="45720">
-                    <a:solidFill>
-                      <a:srgbClr val="F4BA87"/>
-                    </a:solidFill>
-                  </a:tcPr>
-                </a:tc>
-                <a:tc>
-                  <a:txBody>
-                    <a:bodyPr/>
-                    <a:lstStyle/>
-                    <a:p>
-                      <a:r>
-                        <a:rPr sz="1200" b="0">
-                          <a:solidFill>
-                            <a:srgbClr val="233746"/>
-                          </a:solidFill>
-                          <a:latin typeface="Arial"/>
-                          <a:ea typeface="Arial"/>
-                          <a:cs typeface="Arial"/>
-                        </a:rPr>
-                        <a:t/>
-                      </a:r>
-                    </a:p>
-                  </a:txBody>
-                  <a:tcPr marL="91440" marR="91440" marT="45720" marB="45720">
-                    <a:solidFill>
-                      <a:srgbClr val="D96B18"/>
-                    </a:solidFill>
-                  </a:tcPr>
-                </a:tc>
-                <a:tc>
-                  <a:txBody>
-                    <a:bodyPr/>
-                    <a:lstStyle/>
-                    <a:p>
-                      <a:r>
-                        <a:rPr sz="1200" b="0">
-                          <a:solidFill>
-                            <a:srgbClr val="233746"/>
-                          </a:solidFill>
-                          <a:latin typeface="Arial"/>
-                          <a:ea typeface="Arial"/>
-                          <a:cs typeface="Arial"/>
-                        </a:rPr>
-                        <a:t/>
-                      </a:r>
-                    </a:p>
-                  </a:txBody>
-                  <a:tcPr marL="91440" marR="91440" marT="45720" marB="45720">
-                    <a:solidFill>
-                      <a:srgbClr val="D96B18"/>
-                    </a:solidFill>
-                  </a:tcPr>
-                </a:tc>
-                <a:tc>
-                  <a:txBody>
-                    <a:bodyPr/>
-                    <a:lstStyle/>
-                    <a:p>
-                      <a:r>
-                        <a:rPr sz="1200" b="0">
-                          <a:solidFill>
-                            <a:srgbClr val="233746"/>
-                          </a:solidFill>
-                          <a:latin typeface="Arial"/>
-                          <a:ea typeface="Arial"/>
-                          <a:cs typeface="Arial"/>
-                        </a:rPr>
-                        <a:t/>
-                      </a:r>
-                    </a:p>
-                  </a:txBody>
-                  <a:tcPr marL="91440" marR="91440" marT="45720" marB="45720">
-                    <a:solidFill>
-                      <a:srgbClr val="FFFFFF"/>
-                    </a:solidFill>
-                  </a:tcPr>
-                </a:tc>
-                <a:tc>
-                  <a:txBody>
-                    <a:bodyPr/>
-                    <a:lstStyle/>
-                    <a:p>
-                      <a:r>
-                        <a:rPr sz="1200" b="0">
-                          <a:solidFill>
-                            <a:srgbClr val="233746"/>
-                          </a:solidFill>
-                          <a:latin typeface="Arial"/>
-                          <a:ea typeface="Arial"/>
-                          <a:cs typeface="Arial"/>
-                        </a:rPr>
-                        <a:t/>
-                      </a:r>
-                    </a:p>
-                  </a:txBody>
-                  <a:tcPr marL="91440" marR="91440" marT="45720" marB="45720">
-                    <a:solidFill>
-                      <a:srgbClr val="FFFFFF"/>
-                    </a:solidFill>
-                  </a:tcPr>
-                </a:tc>
-              </a:tr>
-              <a:tr h="357188">
-                <a:tc>
-                  <a:txBody>
-                    <a:bodyPr/>
-                    <a:lstStyle/>
-                    <a:p>
-                      <a:r>
-                        <a:rPr sz="1200" b="0">
-                          <a:solidFill>
-                            <a:srgbClr val="233746"/>
-                          </a:solidFill>
-                          <a:latin typeface="Arial"/>
-                          <a:ea typeface="Arial"/>
-                          <a:cs typeface="Arial"/>
-                        </a:rPr>
-                        <a:t>Preparación de la defensa</a:t>
-                      </a:r>
-                    </a:p>
-                  </a:txBody>
-                  <a:tcPr marL="91440" marR="91440" marT="45720" marB="45720">
-                    <a:solidFill>
-                      <a:srgbClr val="FFF3E8"/>
-                    </a:solidFill>
-                  </a:tcPr>
-                </a:tc>
-                <a:tc>
-                  <a:txBody>
-                    <a:bodyPr/>
-                    <a:lstStyle/>
-                    <a:p>
-                      <a:r>
-                        <a:rPr sz="1200" b="0">
-                          <a:solidFill>
-                            <a:srgbClr val="233746"/>
-                          </a:solidFill>
-                          <a:latin typeface="Arial"/>
-                          <a:ea typeface="Arial"/>
-                          <a:cs typeface="Arial"/>
-                        </a:rPr>
-                        <a:t>A y B</a:t>
-                      </a:r>
-                    </a:p>
-                  </a:txBody>
-                  <a:tcPr marL="91440" marR="91440" marT="45720" marB="45720">
-                    <a:solidFill>
-                      <a:srgbClr val="FFF3E8"/>
-                    </a:solidFill>
-                  </a:tcPr>
-                </a:tc>
-                <a:tc>
-                  <a:txBody>
-                    <a:bodyPr/>
-                    <a:lstStyle/>
-                    <a:p>
-                      <a:r>
-                        <a:rPr sz="1200" b="0">
-                          <a:solidFill>
-                            <a:srgbClr val="233746"/>
-                          </a:solidFill>
-                          <a:latin typeface="Arial"/>
-                          <a:ea typeface="Arial"/>
-                          <a:cs typeface="Arial"/>
-                        </a:rPr>
-                        <a:t/>
                       </a:r>
                     </a:p>
                   </a:txBody>
@@ -6057,7 +5503,7 @@
         </p:nvSpPr>
         <p:spPr>
           <a:xfrm xmlns:a="http://schemas.openxmlformats.org/drawingml/2006/main">
-            <a:off x="609600" y="5648325"/>
+            <a:off x="609600" y="5381625"/>
             <a:ext cx="10972800" cy="314325"/>
           </a:xfrm>
           <a:prstGeom xmlns:a="http://schemas.openxmlformats.org/drawingml/2006/main" prst="rect">
@@ -6094,6 +5540,86 @@
                 <a:cs typeface="Arial"/>
               </a:rPr>
               <a:t>Naranja: trabajo previsto · ● Entrega o defensa · S: sesión</a:t>
+            </a:r>
+          </a:p>
+        </p:txBody>
+      </p:sp>
+      <p:sp>
+        <p:nvSpPr>
+          <p:cNvPr id="18" name="">
+            <a:extLst xmlns:a="http://schemas.openxmlformats.org/drawingml/2006/main">
+              <a:ext uri="{FF2B5EF4-FFF2-40B4-BE49-F238E27FC236}">
+                <a16:creationId xmlns:a16="http://schemas.microsoft.com/office/drawing/2014/main" id="{62C9606A-3FA8-4F47-A1E5-D5C55DF786B9}"/>
+              </a:ext>
+            </a:extLst>
+          </p:cNvPr>
+          <p:cNvSpPr>
+            <a:spLocks xmlns:a="http://schemas.openxmlformats.org/drawingml/2006/main" noGrp="1"/>
+          </p:cNvSpPr>
+          <p:nvPr/>
+        </p:nvSpPr>
+        <p:spPr>
+          <a:xfrm xmlns:a="http://schemas.openxmlformats.org/drawingml/2006/main">
+            <a:off x="609600" y="5810250"/>
+            <a:ext cx="10972800" cy="552450"/>
+          </a:xfrm>
+          <a:prstGeom xmlns:a="http://schemas.openxmlformats.org/drawingml/2006/main" prst="rect">
+            <a:avLst/>
+          </a:prstGeom>
+          <a:noFill xmlns:a="http://schemas.openxmlformats.org/drawingml/2006/main"/>
+          <a:ln xmlns:a="http://schemas.openxmlformats.org/drawingml/2006/main" w="0">
+            <a:noFill/>
+          </a:ln>
+        </p:spPr>
+        <p:txBody>
+          <a:bodyPr xmlns:a="http://schemas.openxmlformats.org/drawingml/2006/main">
+            <a:noAutofit/>
+          </a:bodyPr>
+          <a:lstStyle xmlns:a="http://schemas.openxmlformats.org/drawingml/2006/main"/>
+          <a:p xmlns:a="http://schemas.openxmlformats.org/drawingml/2006/main">
+            <a:pPr>
+              <a:defRPr sz="1500">
+                <a:solidFill>
+                  <a:srgbClr val="253B4A"/>
+                </a:solidFill>
+                <a:latin typeface="Arial"/>
+                <a:ea typeface="Arial"/>
+                <a:cs typeface="Arial"/>
+              </a:defRPr>
+            </a:pPr>
+            <a:r>
+              <a:rPr sz="1500">
+                <a:solidFill>
+                  <a:srgbClr val="253B4A"/>
+                </a:solidFill>
+                <a:latin typeface="Arial"/>
+                <a:ea typeface="Arial"/>
+                <a:cs typeface="Arial"/>
+              </a:rPr>
+              <a:t>Punto de partida (S4): tema elegido y plan inicial entregado.</a:t>
+            </a:r>
+          </a:p>
+          <a:p xmlns:a="http://schemas.openxmlformats.org/drawingml/2006/main">
+            <a:pPr>
+              <a:defRPr sz="1500">
+                <a:solidFill>
+                  <a:srgbClr val="253B4A"/>
+                </a:solidFill>
+                <a:latin typeface="Arial"/>
+                <a:ea typeface="Arial"/>
+                <a:cs typeface="Arial"/>
+              </a:defRPr>
+            </a:pPr>
+            <a:r>
+              <a:rPr sz="1500">
+                <a:solidFill>
+                  <a:srgbClr val="253B4A"/>
+                </a:solidFill>
+                <a:latin typeface="Arial"/>
+                <a:ea typeface="Arial"/>
+                <a:cs typeface="Arial"/>
+              </a:rPr>
+              <a:t>El Gantt representa el trabajo pendiente desde esa entrega.</a:t>
             </a:r>
           </a:p>
         </p:txBody>
@@ -6480,16 +6006,15 @@
         </p:nvGraphicFramePr>
         <p:xfrm>
           <a:off xmlns:a="http://schemas.openxmlformats.org/drawingml/2006/main" x="609600" y="1952625"/>
-          <a:ext xmlns:a="http://schemas.openxmlformats.org/drawingml/2006/main" cx="10934700" cy="3571875"/>
+          <a:ext xmlns:a="http://schemas.openxmlformats.org/drawingml/2006/main" cx="10934700" cy="3125388"/>
         </p:xfrm>
         <a:graphic xmlns:a="http://schemas.openxmlformats.org/drawingml/2006/main">
           <a:graphicData uri="http://schemas.openxmlformats.org/drawingml/2006/table">
             <a:tbl>
               <a:tblPr/>
               <a:tblGrid>
-                <a:gridCol w="3390900"/>
+                <a:gridCol w="3943350"/>
                 <a:gridCol w="914400"/>
-                <a:gridCol w="552450"/>
                 <a:gridCol w="552450"/>
                 <a:gridCol w="552450"/>
                 <a:gridCol w="552450"/>
@@ -6565,30 +6090,6 @@
                           <a:ea typeface="Arial"/>
                           <a:cs typeface="Arial"/>
                         </a:rPr>
-                        <a:t>S3</a:t>
-                      </a:r>
-                    </a:p>
-                  </a:txBody>
-                  <a:tcPr marL="91440" marR="91440" marT="45720" marB="45720">
-                    <a:solidFill>
-                      <a:srgbClr val="D96B18"/>
-                    </a:solidFill>
-                  </a:tcPr>
-                </a:tc>
-                <a:tc>
-                  <a:txBody>
-                    <a:bodyPr/>
-                    <a:lstStyle/>
-                    <a:p>
-                      <a:r>
-                        <a:rPr sz="1200" b="1">
-                          <a:solidFill>
-                            <a:srgbClr val="FFFFFF"/>
-                          </a:solidFill>
-                          <a:latin typeface="Arial"/>
-                          <a:ea typeface="Arial"/>
-                          <a:cs typeface="Arial"/>
-                        </a:rPr>
                         <a:t>S4</a:t>
                       </a:r>
                     </a:p>
@@ -6855,13 +6356,13 @@
                           <a:ea typeface="Arial"/>
                           <a:cs typeface="Arial"/>
                         </a:rPr>
-                        <a:t>Planificación</a:t>
-                      </a:r>
-                    </a:p>
-                  </a:txBody>
-                  <a:tcPr marL="91440" marR="91440" marT="45720" marB="45720">
-                    <a:solidFill>
-                      <a:srgbClr val="FFF3E8"/>
+                        <a:t>Arquitectura y diseño</a:t>
+                      </a:r>
+                    </a:p>
+                  </a:txBody>
+                  <a:tcPr marL="91440" marR="91440" marT="45720" marB="45720">
+                    <a:solidFill>
+                      <a:srgbClr val="FFFFFF"/>
                     </a:solidFill>
                   </a:tcPr>
                 </a:tc>
@@ -6885,7 +6386,7 @@
                   </a:txBody>
                   <a:tcPr marL="91440" marR="91440" marT="45720" marB="45720">
                     <a:solidFill>
-                      <a:srgbClr val="FFF3E8"/>
+                      <a:srgbClr val="FFFFFF"/>
                     </a:solidFill>
                   </a:tcPr>
                 </a:tc>
@@ -6919,6 +6420,54 @@
                     <a:lstStyle/>
                     <a:p>
                       <a:r>
+                        <a:rPr sz="1200" b="0">
+                          <a:solidFill>
+                            <a:srgbClr val="233746"/>
+                          </a:solidFill>
+                          <a:latin typeface="Arial"/>
+                          <a:ea typeface="Arial"/>
+                          <a:cs typeface="Arial"/>
+                        </a:rPr>
+                        <a:t/>
+                      </a:r>
+                    </a:p>
+                  </a:txBody>
+                  <a:tcPr marL="91440" marR="91440" marT="45720" marB="45720">
+                    <a:solidFill>
+                      <a:srgbClr val="D96B18"/>
+                    </a:solidFill>
+                  </a:tcPr>
+                </a:tc>
+                <a:tc>
+                  <a:txBody>
+                    <a:bodyPr/>
+                    <a:lstStyle/>
+                    <a:p>
+                      <a:r>
+                        <a:rPr sz="1200" b="0">
+                          <a:solidFill>
+                            <a:srgbClr val="233746"/>
+                          </a:solidFill>
+                          <a:latin typeface="Arial"/>
+                          <a:ea typeface="Arial"/>
+                          <a:cs typeface="Arial"/>
+                        </a:rPr>
+                        <a:t/>
+                      </a:r>
+                    </a:p>
+                  </a:txBody>
+                  <a:tcPr marL="91440" marR="91440" marT="45720" marB="45720">
+                    <a:solidFill>
+                      <a:srgbClr val="D96B18"/>
+                    </a:solidFill>
+                  </a:tcPr>
+                </a:tc>
+                <a:tc>
+                  <a:txBody>
+                    <a:bodyPr/>
+                    <a:lstStyle/>
+                    <a:p>
+                      <a:r>
                         <a:rPr sz="1350" b="1">
                           <a:solidFill>
                             <a:srgbClr val="2162A0"/>
@@ -6957,7 +6506,7 @@
                   </a:txBody>
                   <a:tcPr marL="91440" marR="91440" marT="45720" marB="45720">
                     <a:solidFill>
-                      <a:srgbClr val="FFF3E8"/>
+                      <a:srgbClr val="FFFFFF"/>
                     </a:solidFill>
                   </a:tcPr>
                 </a:tc>
@@ -6981,7 +6530,7 @@
                   </a:txBody>
                   <a:tcPr marL="91440" marR="91440" marT="45720" marB="45720">
                     <a:solidFill>
-                      <a:srgbClr val="FFF3E8"/>
+                      <a:srgbClr val="FFFFFF"/>
                     </a:solidFill>
                   </a:tcPr>
                 </a:tc>
@@ -7005,7 +6554,7 @@
                   </a:txBody>
                   <a:tcPr marL="91440" marR="91440" marT="45720" marB="45720">
                     <a:solidFill>
-                      <a:srgbClr val="FFF3E8"/>
+                      <a:srgbClr val="FFFFFF"/>
                     </a:solidFill>
                   </a:tcPr>
                 </a:tc>
@@ -7029,7 +6578,7 @@
                   </a:txBody>
                   <a:tcPr marL="91440" marR="91440" marT="45720" marB="45720">
                     <a:solidFill>
-                      <a:srgbClr val="FFF3E8"/>
+                      <a:srgbClr val="FFFFFF"/>
                     </a:solidFill>
                   </a:tcPr>
                 </a:tc>
@@ -7053,7 +6602,7 @@
                   </a:txBody>
                   <a:tcPr marL="91440" marR="91440" marT="45720" marB="45720">
                     <a:solidFill>
-                      <a:srgbClr val="FFF3E8"/>
+                      <a:srgbClr val="FFFFFF"/>
                     </a:solidFill>
                   </a:tcPr>
                 </a:tc>
@@ -7077,7 +6626,7 @@
                   </a:txBody>
                   <a:tcPr marL="91440" marR="91440" marT="45720" marB="45720">
                     <a:solidFill>
-                      <a:srgbClr val="FFF3E8"/>
+                      <a:srgbClr val="FFFFFF"/>
                     </a:solidFill>
                   </a:tcPr>
                 </a:tc>
@@ -7101,79 +6650,7 @@
                   </a:txBody>
                   <a:tcPr marL="91440" marR="91440" marT="45720" marB="45720">
                     <a:solidFill>
-                      <a:srgbClr val="FFF3E8"/>
-                    </a:solidFill>
-                  </a:tcPr>
-                </a:tc>
-                <a:tc>
-                  <a:txBody>
-                    <a:bodyPr/>
-                    <a:lstStyle/>
-                    <a:p>
-                      <a:r>
-                        <a:rPr sz="1200" b="0">
-                          <a:solidFill>
-                            <a:srgbClr val="233746"/>
-                          </a:solidFill>
-                          <a:latin typeface="Arial"/>
-                          <a:ea typeface="Arial"/>
-                          <a:cs typeface="Arial"/>
-                        </a:rPr>
-                        <a:t/>
-                      </a:r>
-                    </a:p>
-                  </a:txBody>
-                  <a:tcPr marL="91440" marR="91440" marT="45720" marB="45720">
-                    <a:solidFill>
-                      <a:srgbClr val="FFF3E8"/>
-                    </a:solidFill>
-                  </a:tcPr>
-                </a:tc>
-                <a:tc>
-                  <a:txBody>
-                    <a:bodyPr/>
-                    <a:lstStyle/>
-                    <a:p>
-                      <a:r>
-                        <a:rPr sz="1200" b="0">
-                          <a:solidFill>
-                            <a:srgbClr val="233746"/>
-                          </a:solidFill>
-                          <a:latin typeface="Arial"/>
-                          <a:ea typeface="Arial"/>
-                          <a:cs typeface="Arial"/>
-                        </a:rPr>
-                        <a:t/>
-                      </a:r>
-                    </a:p>
-                  </a:txBody>
-                  <a:tcPr marL="91440" marR="91440" marT="45720" marB="45720">
-                    <a:solidFill>
-                      <a:srgbClr val="FFF3E8"/>
-                    </a:solidFill>
-                  </a:tcPr>
-                </a:tc>
-                <a:tc>
-                  <a:txBody>
-                    <a:bodyPr/>
-                    <a:lstStyle/>
-                    <a:p>
-                      <a:r>
-                        <a:rPr sz="1200" b="0">
-                          <a:solidFill>
-                            <a:srgbClr val="233746"/>
-                          </a:solidFill>
-                          <a:latin typeface="Arial"/>
-                          <a:ea typeface="Arial"/>
-                          <a:cs typeface="Arial"/>
-                        </a:rPr>
-                        <a:t/>
-                      </a:r>
-                    </a:p>
-                  </a:txBody>
-                  <a:tcPr marL="91440" marR="91440" marT="45720" marB="45720">
-                    <a:solidFill>
-                      <a:srgbClr val="FFF3E8"/>
+                      <a:srgbClr val="FFFFFF"/>
                     </a:solidFill>
                   </a:tcPr>
                 </a:tc>
@@ -7193,13 +6670,13 @@
                           <a:ea typeface="Arial"/>
                           <a:cs typeface="Arial"/>
                         </a:rPr>
-                        <a:t>Arquitectura y diseño</a:t>
-                      </a:r>
-                    </a:p>
-                  </a:txBody>
-                  <a:tcPr marL="91440" marR="91440" marT="45720" marB="45720">
-                    <a:solidFill>
-                      <a:srgbClr val="FFFFFF"/>
+                        <a:t>Implementación del prototipo</a:t>
+                      </a:r>
+                    </a:p>
+                  </a:txBody>
+                  <a:tcPr marL="91440" marR="91440" marT="45720" marB="45720">
+                    <a:solidFill>
+                      <a:srgbClr val="FFF3E8"/>
                     </a:solidFill>
                   </a:tcPr>
                 </a:tc>
@@ -7223,7 +6700,7 @@
                   </a:txBody>
                   <a:tcPr marL="91440" marR="91440" marT="45720" marB="45720">
                     <a:solidFill>
-                      <a:srgbClr val="FFFFFF"/>
+                      <a:srgbClr val="FFF3E8"/>
                     </a:solidFill>
                   </a:tcPr>
                 </a:tc>
@@ -7247,7 +6724,7 @@
                   </a:txBody>
                   <a:tcPr marL="91440" marR="91440" marT="45720" marB="45720">
                     <a:solidFill>
-                      <a:srgbClr val="FFFFFF"/>
+                      <a:srgbClr val="FFF3E8"/>
                     </a:solidFill>
                   </a:tcPr>
                 </a:tc>
@@ -7271,6 +6748,30 @@
                   </a:txBody>
                   <a:tcPr marL="91440" marR="91440" marT="45720" marB="45720">
                     <a:solidFill>
+                      <a:srgbClr val="FFF3E8"/>
+                    </a:solidFill>
+                  </a:tcPr>
+                </a:tc>
+                <a:tc>
+                  <a:txBody>
+                    <a:bodyPr/>
+                    <a:lstStyle/>
+                    <a:p>
+                      <a:r>
+                        <a:rPr sz="1200" b="0">
+                          <a:solidFill>
+                            <a:srgbClr val="233746"/>
+                          </a:solidFill>
+                          <a:latin typeface="Arial"/>
+                          <a:ea typeface="Arial"/>
+                          <a:cs typeface="Arial"/>
+                        </a:rPr>
+                        <a:t/>
+                      </a:r>
+                    </a:p>
+                  </a:txBody>
+                  <a:tcPr marL="91440" marR="91440" marT="45720" marB="45720">
+                    <a:solidFill>
                       <a:srgbClr val="D96B18"/>
                     </a:solidFill>
                   </a:tcPr>
@@ -7367,7 +6868,7 @@
                   </a:txBody>
                   <a:tcPr marL="91440" marR="91440" marT="45720" marB="45720">
                     <a:solidFill>
-                      <a:srgbClr val="FFFFFF"/>
+                      <a:srgbClr val="FFF3E8"/>
                     </a:solidFill>
                   </a:tcPr>
                 </a:tc>
@@ -7391,7 +6892,7 @@
                   </a:txBody>
                   <a:tcPr marL="91440" marR="91440" marT="45720" marB="45720">
                     <a:solidFill>
-                      <a:srgbClr val="FFFFFF"/>
+                      <a:srgbClr val="FFF3E8"/>
                     </a:solidFill>
                   </a:tcPr>
                 </a:tc>
@@ -7415,7 +6916,7 @@
                   </a:txBody>
                   <a:tcPr marL="91440" marR="91440" marT="45720" marB="45720">
                     <a:solidFill>
-                      <a:srgbClr val="FFFFFF"/>
+                      <a:srgbClr val="FFF3E8"/>
                     </a:solidFill>
                   </a:tcPr>
                 </a:tc>
@@ -7439,7 +6940,7 @@
                   </a:txBody>
                   <a:tcPr marL="91440" marR="91440" marT="45720" marB="45720">
                     <a:solidFill>
-                      <a:srgbClr val="FFFFFF"/>
+                      <a:srgbClr val="FFF3E8"/>
                     </a:solidFill>
                   </a:tcPr>
                 </a:tc>
@@ -7463,55 +6964,7 @@
                   </a:txBody>
                   <a:tcPr marL="91440" marR="91440" marT="45720" marB="45720">
                     <a:solidFill>
-                      <a:srgbClr val="FFFFFF"/>
-                    </a:solidFill>
-                  </a:tcPr>
-                </a:tc>
-                <a:tc>
-                  <a:txBody>
-                    <a:bodyPr/>
-                    <a:lstStyle/>
-                    <a:p>
-                      <a:r>
-                        <a:rPr sz="1200" b="0">
-                          <a:solidFill>
-                            <a:srgbClr val="233746"/>
-                          </a:solidFill>
-                          <a:latin typeface="Arial"/>
-                          <a:ea typeface="Arial"/>
-                          <a:cs typeface="Arial"/>
-                        </a:rPr>
-                        <a:t/>
-                      </a:r>
-                    </a:p>
-                  </a:txBody>
-                  <a:tcPr marL="91440" marR="91440" marT="45720" marB="45720">
-                    <a:solidFill>
-                      <a:srgbClr val="FFFFFF"/>
-                    </a:solidFill>
-                  </a:tcPr>
-                </a:tc>
-                <a:tc>
-                  <a:txBody>
-                    <a:bodyPr/>
-                    <a:lstStyle/>
-                    <a:p>
-                      <a:r>
-                        <a:rPr sz="1200" b="0">
-                          <a:solidFill>
-                            <a:srgbClr val="233746"/>
-                          </a:solidFill>
-                          <a:latin typeface="Arial"/>
-                          <a:ea typeface="Arial"/>
-                          <a:cs typeface="Arial"/>
-                        </a:rPr>
-                        <a:t/>
-                      </a:r>
-                    </a:p>
-                  </a:txBody>
-                  <a:tcPr marL="91440" marR="91440" marT="45720" marB="45720">
-                    <a:solidFill>
-                      <a:srgbClr val="FFFFFF"/>
+                      <a:srgbClr val="FFF3E8"/>
                     </a:solidFill>
                   </a:tcPr>
                 </a:tc>
@@ -7531,13 +6984,13 @@
                           <a:ea typeface="Arial"/>
                           <a:cs typeface="Arial"/>
                         </a:rPr>
-                        <a:t>Implementación del prototipo</a:t>
-                      </a:r>
-                    </a:p>
-                  </a:txBody>
-                  <a:tcPr marL="91440" marR="91440" marT="45720" marB="45720">
-                    <a:solidFill>
-                      <a:srgbClr val="FFF3E8"/>
+                        <a:t>Implementación final</a:t>
+                      </a:r>
+                    </a:p>
+                  </a:txBody>
+                  <a:tcPr marL="91440" marR="91440" marT="45720" marB="45720">
+                    <a:solidFill>
+                      <a:srgbClr val="FFFFFF"/>
                     </a:solidFill>
                   </a:tcPr>
                 </a:tc>
@@ -7561,7 +7014,7 @@
                   </a:txBody>
                   <a:tcPr marL="91440" marR="91440" marT="45720" marB="45720">
                     <a:solidFill>
-                      <a:srgbClr val="FFF3E8"/>
+                      <a:srgbClr val="FFFFFF"/>
                     </a:solidFill>
                   </a:tcPr>
                 </a:tc>
@@ -7585,7 +7038,7 @@
                   </a:txBody>
                   <a:tcPr marL="91440" marR="91440" marT="45720" marB="45720">
                     <a:solidFill>
-                      <a:srgbClr val="FFF3E8"/>
+                      <a:srgbClr val="FFFFFF"/>
                     </a:solidFill>
                   </a:tcPr>
                 </a:tc>
@@ -7609,7 +7062,7 @@
                   </a:txBody>
                   <a:tcPr marL="91440" marR="91440" marT="45720" marB="45720">
                     <a:solidFill>
-                      <a:srgbClr val="FFF3E8"/>
+                      <a:srgbClr val="FFFFFF"/>
                     </a:solidFill>
                   </a:tcPr>
                 </a:tc>
@@ -7633,7 +7086,7 @@
                   </a:txBody>
                   <a:tcPr marL="91440" marR="91440" marT="45720" marB="45720">
                     <a:solidFill>
-                      <a:srgbClr val="FFF3E8"/>
+                      <a:srgbClr val="FFFFFF"/>
                     </a:solidFill>
                   </a:tcPr>
                 </a:tc>
@@ -7657,6 +7110,54 @@
                   </a:txBody>
                   <a:tcPr marL="91440" marR="91440" marT="45720" marB="45720">
                     <a:solidFill>
+                      <a:srgbClr val="FFFFFF"/>
+                    </a:solidFill>
+                  </a:tcPr>
+                </a:tc>
+                <a:tc>
+                  <a:txBody>
+                    <a:bodyPr/>
+                    <a:lstStyle/>
+                    <a:p>
+                      <a:r>
+                        <a:rPr sz="1200" b="0">
+                          <a:solidFill>
+                            <a:srgbClr val="233746"/>
+                          </a:solidFill>
+                          <a:latin typeface="Arial"/>
+                          <a:ea typeface="Arial"/>
+                          <a:cs typeface="Arial"/>
+                        </a:rPr>
+                        <a:t/>
+                      </a:r>
+                    </a:p>
+                  </a:txBody>
+                  <a:tcPr marL="91440" marR="91440" marT="45720" marB="45720">
+                    <a:solidFill>
+                      <a:srgbClr val="FFFFFF"/>
+                    </a:solidFill>
+                  </a:tcPr>
+                </a:tc>
+                <a:tc>
+                  <a:txBody>
+                    <a:bodyPr/>
+                    <a:lstStyle/>
+                    <a:p>
+                      <a:r>
+                        <a:rPr sz="1200" b="0">
+                          <a:solidFill>
+                            <a:srgbClr val="233746"/>
+                          </a:solidFill>
+                          <a:latin typeface="Arial"/>
+                          <a:ea typeface="Arial"/>
+                          <a:cs typeface="Arial"/>
+                        </a:rPr>
+                        <a:t/>
+                      </a:r>
+                    </a:p>
+                  </a:txBody>
+                  <a:tcPr marL="91440" marR="91440" marT="45720" marB="45720">
+                    <a:solidFill>
                       <a:srgbClr val="D96B18"/>
                     </a:solidFill>
                   </a:tcPr>
@@ -7715,30 +7216,6 @@
                     <a:lstStyle/>
                     <a:p>
                       <a:r>
-                        <a:rPr sz="1350" b="1">
-                          <a:solidFill>
-                            <a:srgbClr val="2162A0"/>
-                          </a:solidFill>
-                          <a:latin typeface="Arial"/>
-                          <a:ea typeface="Arial"/>
-                          <a:cs typeface="Arial"/>
-                        </a:rPr>
-                        <a:t>●</a:t>
-                      </a:r>
-                    </a:p>
-                  </a:txBody>
-                  <a:tcPr marL="91440" marR="91440" marT="45720" marB="45720">
-                    <a:solidFill>
-                      <a:srgbClr val="E8F1FA"/>
-                    </a:solidFill>
-                  </a:tcPr>
-                </a:tc>
-                <a:tc>
-                  <a:txBody>
-                    <a:bodyPr/>
-                    <a:lstStyle/>
-                    <a:p>
-                      <a:r>
                         <a:rPr sz="1200" b="0">
                           <a:solidFill>
                             <a:srgbClr val="233746"/>
@@ -7753,7 +7230,7 @@
                   </a:txBody>
                   <a:tcPr marL="91440" marR="91440" marT="45720" marB="45720">
                     <a:solidFill>
-                      <a:srgbClr val="FFF3E8"/>
+                      <a:srgbClr val="D96B18"/>
                     </a:solidFill>
                   </a:tcPr>
                 </a:tc>
@@ -7777,7 +7254,7 @@
                   </a:txBody>
                   <a:tcPr marL="91440" marR="91440" marT="45720" marB="45720">
                     <a:solidFill>
-                      <a:srgbClr val="FFF3E8"/>
+                      <a:srgbClr val="FFFFFF"/>
                     </a:solidFill>
                   </a:tcPr>
                 </a:tc>
@@ -7801,55 +7278,7 @@
                   </a:txBody>
                   <a:tcPr marL="91440" marR="91440" marT="45720" marB="45720">
                     <a:solidFill>
-                      <a:srgbClr val="FFF3E8"/>
-                    </a:solidFill>
-                  </a:tcPr>
-                </a:tc>
-                <a:tc>
-                  <a:txBody>
-                    <a:bodyPr/>
-                    <a:lstStyle/>
-                    <a:p>
-                      <a:r>
-                        <a:rPr sz="1200" b="0">
-                          <a:solidFill>
-                            <a:srgbClr val="233746"/>
-                          </a:solidFill>
-                          <a:latin typeface="Arial"/>
-                          <a:ea typeface="Arial"/>
-                          <a:cs typeface="Arial"/>
-                        </a:rPr>
-                        <a:t/>
-                      </a:r>
-                    </a:p>
-                  </a:txBody>
-                  <a:tcPr marL="91440" marR="91440" marT="45720" marB="45720">
-                    <a:solidFill>
-                      <a:srgbClr val="FFF3E8"/>
-                    </a:solidFill>
-                  </a:tcPr>
-                </a:tc>
-                <a:tc>
-                  <a:txBody>
-                    <a:bodyPr/>
-                    <a:lstStyle/>
-                    <a:p>
-                      <a:r>
-                        <a:rPr sz="1200" b="0">
-                          <a:solidFill>
-                            <a:srgbClr val="233746"/>
-                          </a:solidFill>
-                          <a:latin typeface="Arial"/>
-                          <a:ea typeface="Arial"/>
-                          <a:cs typeface="Arial"/>
-                        </a:rPr>
-                        <a:t/>
-                      </a:r>
-                    </a:p>
-                  </a:txBody>
-                  <a:tcPr marL="91440" marR="91440" marT="45720" marB="45720">
-                    <a:solidFill>
-                      <a:srgbClr val="FFF3E8"/>
+                      <a:srgbClr val="FFFFFF"/>
                     </a:solidFill>
                   </a:tcPr>
                 </a:tc>
@@ -7869,13 +7298,13 @@
                           <a:ea typeface="Arial"/>
                           <a:cs typeface="Arial"/>
                         </a:rPr>
-                        <a:t>Implementación final</a:t>
-                      </a:r>
-                    </a:p>
-                  </a:txBody>
-                  <a:tcPr marL="91440" marR="91440" marT="45720" marB="45720">
-                    <a:solidFill>
-                      <a:srgbClr val="FFFFFF"/>
+                        <a:t>Pruebas y correcciones</a:t>
+                      </a:r>
+                    </a:p>
+                  </a:txBody>
+                  <a:tcPr marL="91440" marR="91440" marT="45720" marB="45720">
+                    <a:solidFill>
+                      <a:srgbClr val="FFF3E8"/>
                     </a:solidFill>
                   </a:tcPr>
                 </a:tc>
@@ -7899,7 +7328,7 @@
                   </a:txBody>
                   <a:tcPr marL="91440" marR="91440" marT="45720" marB="45720">
                     <a:solidFill>
-                      <a:srgbClr val="FFFFFF"/>
+                      <a:srgbClr val="FFF3E8"/>
                     </a:solidFill>
                   </a:tcPr>
                 </a:tc>
@@ -7923,7 +7352,7 @@
                   </a:txBody>
                   <a:tcPr marL="91440" marR="91440" marT="45720" marB="45720">
                     <a:solidFill>
-                      <a:srgbClr val="FFFFFF"/>
+                      <a:srgbClr val="FFF3E8"/>
                     </a:solidFill>
                   </a:tcPr>
                 </a:tc>
@@ -7947,7 +7376,7 @@
                   </a:txBody>
                   <a:tcPr marL="91440" marR="91440" marT="45720" marB="45720">
                     <a:solidFill>
-                      <a:srgbClr val="FFFFFF"/>
+                      <a:srgbClr val="FFF3E8"/>
                     </a:solidFill>
                   </a:tcPr>
                 </a:tc>
@@ -7971,7 +7400,7 @@
                   </a:txBody>
                   <a:tcPr marL="91440" marR="91440" marT="45720" marB="45720">
                     <a:solidFill>
-                      <a:srgbClr val="FFFFFF"/>
+                      <a:srgbClr val="D96B18"/>
                     </a:solidFill>
                   </a:tcPr>
                 </a:tc>
@@ -7995,7 +7424,7 @@
                   </a:txBody>
                   <a:tcPr marL="91440" marR="91440" marT="45720" marB="45720">
                     <a:solidFill>
-                      <a:srgbClr val="FFFFFF"/>
+                      <a:srgbClr val="D96B18"/>
                     </a:solidFill>
                   </a:tcPr>
                 </a:tc>
@@ -8019,7 +7448,7 @@
                   </a:txBody>
                   <a:tcPr marL="91440" marR="91440" marT="45720" marB="45720">
                     <a:solidFill>
-                      <a:srgbClr val="FFFFFF"/>
+                      <a:srgbClr val="D96B18"/>
                     </a:solidFill>
                   </a:tcPr>
                 </a:tc>
@@ -8043,7 +7472,7 @@
                   </a:txBody>
                   <a:tcPr marL="91440" marR="91440" marT="45720" marB="45720">
                     <a:solidFill>
-                      <a:srgbClr val="FFFFFF"/>
+                      <a:srgbClr val="D96B18"/>
                     </a:solidFill>
                   </a:tcPr>
                 </a:tc>
@@ -8139,7 +7568,7 @@
                   </a:txBody>
                   <a:tcPr marL="91440" marR="91440" marT="45720" marB="45720">
                     <a:solidFill>
-                      <a:srgbClr val="D96B18"/>
+                      <a:srgbClr val="FFF3E8"/>
                     </a:solidFill>
                   </a:tcPr>
                 </a:tc>
@@ -8163,31 +7592,7 @@
                   </a:txBody>
                   <a:tcPr marL="91440" marR="91440" marT="45720" marB="45720">
                     <a:solidFill>
-                      <a:srgbClr val="FFFFFF"/>
-                    </a:solidFill>
-                  </a:tcPr>
-                </a:tc>
-                <a:tc>
-                  <a:txBody>
-                    <a:bodyPr/>
-                    <a:lstStyle/>
-                    <a:p>
-                      <a:r>
-                        <a:rPr sz="1200" b="0">
-                          <a:solidFill>
-                            <a:srgbClr val="233746"/>
-                          </a:solidFill>
-                          <a:latin typeface="Arial"/>
-                          <a:ea typeface="Arial"/>
-                          <a:cs typeface="Arial"/>
-                        </a:rPr>
-                        <a:t/>
-                      </a:r>
-                    </a:p>
-                  </a:txBody>
-                  <a:tcPr marL="91440" marR="91440" marT="45720" marB="45720">
-                    <a:solidFill>
-                      <a:srgbClr val="FFFFFF"/>
+                      <a:srgbClr val="FFF3E8"/>
                     </a:solidFill>
                   </a:tcPr>
                 </a:tc>
@@ -8207,13 +7612,13 @@
                           <a:ea typeface="Arial"/>
                           <a:cs typeface="Arial"/>
                         </a:rPr>
-                        <a:t>Pruebas y correcciones</a:t>
-                      </a:r>
-                    </a:p>
-                  </a:txBody>
-                  <a:tcPr marL="91440" marR="91440" marT="45720" marB="45720">
-                    <a:solidFill>
-                      <a:srgbClr val="FFF3E8"/>
+                        <a:t>Memoria</a:t>
+                      </a:r>
+                    </a:p>
+                  </a:txBody>
+                  <a:tcPr marL="91440" marR="91440" marT="45720" marB="45720">
+                    <a:solidFill>
+                      <a:srgbClr val="FFFFFF"/>
                     </a:solidFill>
                   </a:tcPr>
                 </a:tc>
@@ -8237,7 +7642,7 @@
                   </a:txBody>
                   <a:tcPr marL="91440" marR="91440" marT="45720" marB="45720">
                     <a:solidFill>
-                      <a:srgbClr val="FFF3E8"/>
+                      <a:srgbClr val="FFFFFF"/>
                     </a:solidFill>
                   </a:tcPr>
                 </a:tc>
@@ -8261,7 +7666,7 @@
                   </a:txBody>
                   <a:tcPr marL="91440" marR="91440" marT="45720" marB="45720">
                     <a:solidFill>
-                      <a:srgbClr val="FFF3E8"/>
+                      <a:srgbClr val="D96B18"/>
                     </a:solidFill>
                   </a:tcPr>
                 </a:tc>
@@ -8285,7 +7690,7 @@
                   </a:txBody>
                   <a:tcPr marL="91440" marR="91440" marT="45720" marB="45720">
                     <a:solidFill>
-                      <a:srgbClr val="FFF3E8"/>
+                      <a:srgbClr val="D96B18"/>
                     </a:solidFill>
                   </a:tcPr>
                 </a:tc>
@@ -8309,7 +7714,7 @@
                   </a:txBody>
                   <a:tcPr marL="91440" marR="91440" marT="45720" marB="45720">
                     <a:solidFill>
-                      <a:srgbClr val="FFF3E8"/>
+                      <a:srgbClr val="D96B18"/>
                     </a:solidFill>
                   </a:tcPr>
                 </a:tc>
@@ -8391,6 +7796,30 @@
                     <a:lstStyle/>
                     <a:p>
                       <a:r>
+                        <a:rPr sz="1350" b="1">
+                          <a:solidFill>
+                            <a:srgbClr val="2162A0"/>
+                          </a:solidFill>
+                          <a:latin typeface="Arial"/>
+                          <a:ea typeface="Arial"/>
+                          <a:cs typeface="Arial"/>
+                        </a:rPr>
+                        <a:t>●</a:t>
+                      </a:r>
+                    </a:p>
+                  </a:txBody>
+                  <a:tcPr marL="91440" marR="91440" marT="45720" marB="45720">
+                    <a:solidFill>
+                      <a:srgbClr val="F4BA87"/>
+                    </a:solidFill>
+                  </a:tcPr>
+                </a:tc>
+                <a:tc>
+                  <a:txBody>
+                    <a:bodyPr/>
+                    <a:lstStyle/>
+                    <a:p>
+                      <a:r>
                         <a:rPr sz="1200" b="0">
                           <a:solidFill>
                             <a:srgbClr val="233746"/>
@@ -8453,7 +7882,7 @@
                   </a:txBody>
                   <a:tcPr marL="91440" marR="91440" marT="45720" marB="45720">
                     <a:solidFill>
-                      <a:srgbClr val="D96B18"/>
+                      <a:srgbClr val="FFFFFF"/>
                     </a:solidFill>
                   </a:tcPr>
                 </a:tc>
@@ -8477,55 +7906,7 @@
                   </a:txBody>
                   <a:tcPr marL="91440" marR="91440" marT="45720" marB="45720">
                     <a:solidFill>
-                      <a:srgbClr val="D96B18"/>
-                    </a:solidFill>
-                  </a:tcPr>
-                </a:tc>
-                <a:tc>
-                  <a:txBody>
-                    <a:bodyPr/>
-                    <a:lstStyle/>
-                    <a:p>
-                      <a:r>
-                        <a:rPr sz="1200" b="0">
-                          <a:solidFill>
-                            <a:srgbClr val="233746"/>
-                          </a:solidFill>
-                          <a:latin typeface="Arial"/>
-                          <a:ea typeface="Arial"/>
-                          <a:cs typeface="Arial"/>
-                        </a:rPr>
-                        <a:t/>
-                      </a:r>
-                    </a:p>
-                  </a:txBody>
-                  <a:tcPr marL="91440" marR="91440" marT="45720" marB="45720">
-                    <a:solidFill>
-                      <a:srgbClr val="FFF3E8"/>
-                    </a:solidFill>
-                  </a:tcPr>
-                </a:tc>
-                <a:tc>
-                  <a:txBody>
-                    <a:bodyPr/>
-                    <a:lstStyle/>
-                    <a:p>
-                      <a:r>
-                        <a:rPr sz="1200" b="0">
-                          <a:solidFill>
-                            <a:srgbClr val="233746"/>
-                          </a:solidFill>
-                          <a:latin typeface="Arial"/>
-                          <a:ea typeface="Arial"/>
-                          <a:cs typeface="Arial"/>
-                        </a:rPr>
-                        <a:t/>
-                      </a:r>
-                    </a:p>
-                  </a:txBody>
-                  <a:tcPr marL="91440" marR="91440" marT="45720" marB="45720">
-                    <a:solidFill>
-                      <a:srgbClr val="FFF3E8"/>
+                      <a:srgbClr val="FFFFFF"/>
                     </a:solidFill>
                   </a:tcPr>
                 </a:tc>
@@ -8545,13 +7926,13 @@
                           <a:ea typeface="Arial"/>
                           <a:cs typeface="Arial"/>
                         </a:rPr>
-                        <a:t>Memoria</a:t>
-                      </a:r>
-                    </a:p>
-                  </a:txBody>
-                  <a:tcPr marL="91440" marR="91440" marT="45720" marB="45720">
-                    <a:solidFill>
-                      <a:srgbClr val="FFFFFF"/>
+                        <a:t>Preparación de la defensa</a:t>
+                      </a:r>
+                    </a:p>
+                  </a:txBody>
+                  <a:tcPr marL="91440" marR="91440" marT="45720" marB="45720">
+                    <a:solidFill>
+                      <a:srgbClr val="FFF3E8"/>
                     </a:solidFill>
                   </a:tcPr>
                 </a:tc>
@@ -8570,368 +7951,6 @@
                           <a:cs typeface="Arial"/>
                         </a:rPr>
                         <a:t>A y B</a:t>
-                      </a:r>
-                    </a:p>
-                  </a:txBody>
-                  <a:tcPr marL="91440" marR="91440" marT="45720" marB="45720">
-                    <a:solidFill>
-                      <a:srgbClr val="FFFFFF"/>
-                    </a:solidFill>
-                  </a:tcPr>
-                </a:tc>
-                <a:tc>
-                  <a:txBody>
-                    <a:bodyPr/>
-                    <a:lstStyle/>
-                    <a:p>
-                      <a:r>
-                        <a:rPr sz="1200" b="0">
-                          <a:solidFill>
-                            <a:srgbClr val="233746"/>
-                          </a:solidFill>
-                          <a:latin typeface="Arial"/>
-                          <a:ea typeface="Arial"/>
-                          <a:cs typeface="Arial"/>
-                        </a:rPr>
-                        <a:t/>
-                      </a:r>
-                    </a:p>
-                  </a:txBody>
-                  <a:tcPr marL="91440" marR="91440" marT="45720" marB="45720">
-                    <a:solidFill>
-                      <a:srgbClr val="D96B18"/>
-                    </a:solidFill>
-                  </a:tcPr>
-                </a:tc>
-                <a:tc>
-                  <a:txBody>
-                    <a:bodyPr/>
-                    <a:lstStyle/>
-                    <a:p>
-                      <a:r>
-                        <a:rPr sz="1200" b="0">
-                          <a:solidFill>
-                            <a:srgbClr val="233746"/>
-                          </a:solidFill>
-                          <a:latin typeface="Arial"/>
-                          <a:ea typeface="Arial"/>
-                          <a:cs typeface="Arial"/>
-                        </a:rPr>
-                        <a:t/>
-                      </a:r>
-                    </a:p>
-                  </a:txBody>
-                  <a:tcPr marL="91440" marR="91440" marT="45720" marB="45720">
-                    <a:solidFill>
-                      <a:srgbClr val="D96B18"/>
-                    </a:solidFill>
-                  </a:tcPr>
-                </a:tc>
-                <a:tc>
-                  <a:txBody>
-                    <a:bodyPr/>
-                    <a:lstStyle/>
-                    <a:p>
-                      <a:r>
-                        <a:rPr sz="1200" b="0">
-                          <a:solidFill>
-                            <a:srgbClr val="233746"/>
-                          </a:solidFill>
-                          <a:latin typeface="Arial"/>
-                          <a:ea typeface="Arial"/>
-                          <a:cs typeface="Arial"/>
-                        </a:rPr>
-                        <a:t/>
-                      </a:r>
-                    </a:p>
-                  </a:txBody>
-                  <a:tcPr marL="91440" marR="91440" marT="45720" marB="45720">
-                    <a:solidFill>
-                      <a:srgbClr val="D96B18"/>
-                    </a:solidFill>
-                  </a:tcPr>
-                </a:tc>
-                <a:tc>
-                  <a:txBody>
-                    <a:bodyPr/>
-                    <a:lstStyle/>
-                    <a:p>
-                      <a:r>
-                        <a:rPr sz="1200" b="0">
-                          <a:solidFill>
-                            <a:srgbClr val="233746"/>
-                          </a:solidFill>
-                          <a:latin typeface="Arial"/>
-                          <a:ea typeface="Arial"/>
-                          <a:cs typeface="Arial"/>
-                        </a:rPr>
-                        <a:t/>
-                      </a:r>
-                    </a:p>
-                  </a:txBody>
-                  <a:tcPr marL="91440" marR="91440" marT="45720" marB="45720">
-                    <a:solidFill>
-                      <a:srgbClr val="D96B18"/>
-                    </a:solidFill>
-                  </a:tcPr>
-                </a:tc>
-                <a:tc>
-                  <a:txBody>
-                    <a:bodyPr/>
-                    <a:lstStyle/>
-                    <a:p>
-                      <a:r>
-                        <a:rPr sz="1200" b="0">
-                          <a:solidFill>
-                            <a:srgbClr val="233746"/>
-                          </a:solidFill>
-                          <a:latin typeface="Arial"/>
-                          <a:ea typeface="Arial"/>
-                          <a:cs typeface="Arial"/>
-                        </a:rPr>
-                        <a:t/>
-                      </a:r>
-                    </a:p>
-                  </a:txBody>
-                  <a:tcPr marL="91440" marR="91440" marT="45720" marB="45720">
-                    <a:solidFill>
-                      <a:srgbClr val="D96B18"/>
-                    </a:solidFill>
-                  </a:tcPr>
-                </a:tc>
-                <a:tc>
-                  <a:txBody>
-                    <a:bodyPr/>
-                    <a:lstStyle/>
-                    <a:p>
-                      <a:r>
-                        <a:rPr sz="1200" b="0">
-                          <a:solidFill>
-                            <a:srgbClr val="233746"/>
-                          </a:solidFill>
-                          <a:latin typeface="Arial"/>
-                          <a:ea typeface="Arial"/>
-                          <a:cs typeface="Arial"/>
-                        </a:rPr>
-                        <a:t/>
-                      </a:r>
-                    </a:p>
-                  </a:txBody>
-                  <a:tcPr marL="91440" marR="91440" marT="45720" marB="45720">
-                    <a:solidFill>
-                      <a:srgbClr val="D96B18"/>
-                    </a:solidFill>
-                  </a:tcPr>
-                </a:tc>
-                <a:tc>
-                  <a:txBody>
-                    <a:bodyPr/>
-                    <a:lstStyle/>
-                    <a:p>
-                      <a:r>
-                        <a:rPr sz="1200" b="0">
-                          <a:solidFill>
-                            <a:srgbClr val="233746"/>
-                          </a:solidFill>
-                          <a:latin typeface="Arial"/>
-                          <a:ea typeface="Arial"/>
-                          <a:cs typeface="Arial"/>
-                        </a:rPr>
-                        <a:t/>
-                      </a:r>
-                    </a:p>
-                  </a:txBody>
-                  <a:tcPr marL="91440" marR="91440" marT="45720" marB="45720">
-                    <a:solidFill>
-                      <a:srgbClr val="D96B18"/>
-                    </a:solidFill>
-                  </a:tcPr>
-                </a:tc>
-                <a:tc>
-                  <a:txBody>
-                    <a:bodyPr/>
-                    <a:lstStyle/>
-                    <a:p>
-                      <a:r>
-                        <a:rPr sz="1350" b="1">
-                          <a:solidFill>
-                            <a:srgbClr val="2162A0"/>
-                          </a:solidFill>
-                          <a:latin typeface="Arial"/>
-                          <a:ea typeface="Arial"/>
-                          <a:cs typeface="Arial"/>
-                        </a:rPr>
-                        <a:t>●</a:t>
-                      </a:r>
-                    </a:p>
-                  </a:txBody>
-                  <a:tcPr marL="91440" marR="91440" marT="45720" marB="45720">
-                    <a:solidFill>
-                      <a:srgbClr val="F4BA87"/>
-                    </a:solidFill>
-                  </a:tcPr>
-                </a:tc>
-                <a:tc>
-                  <a:txBody>
-                    <a:bodyPr/>
-                    <a:lstStyle/>
-                    <a:p>
-                      <a:r>
-                        <a:rPr sz="1200" b="0">
-                          <a:solidFill>
-                            <a:srgbClr val="233746"/>
-                          </a:solidFill>
-                          <a:latin typeface="Arial"/>
-                          <a:ea typeface="Arial"/>
-                          <a:cs typeface="Arial"/>
-                        </a:rPr>
-                        <a:t/>
-                      </a:r>
-                    </a:p>
-                  </a:txBody>
-                  <a:tcPr marL="91440" marR="91440" marT="45720" marB="45720">
-                    <a:solidFill>
-                      <a:srgbClr val="D96B18"/>
-                    </a:solidFill>
-                  </a:tcPr>
-                </a:tc>
-                <a:tc>
-                  <a:txBody>
-                    <a:bodyPr/>
-                    <a:lstStyle/>
-                    <a:p>
-                      <a:r>
-                        <a:rPr sz="1200" b="0">
-                          <a:solidFill>
-                            <a:srgbClr val="233746"/>
-                          </a:solidFill>
-                          <a:latin typeface="Arial"/>
-                          <a:ea typeface="Arial"/>
-                          <a:cs typeface="Arial"/>
-                        </a:rPr>
-                        <a:t/>
-                      </a:r>
-                    </a:p>
-                  </a:txBody>
-                  <a:tcPr marL="91440" marR="91440" marT="45720" marB="45720">
-                    <a:solidFill>
-                      <a:srgbClr val="D96B18"/>
-                    </a:solidFill>
-                  </a:tcPr>
-                </a:tc>
-                <a:tc>
-                  <a:txBody>
-                    <a:bodyPr/>
-                    <a:lstStyle/>
-                    <a:p>
-                      <a:r>
-                        <a:rPr sz="1200" b="0">
-                          <a:solidFill>
-                            <a:srgbClr val="233746"/>
-                          </a:solidFill>
-                          <a:latin typeface="Arial"/>
-                          <a:ea typeface="Arial"/>
-                          <a:cs typeface="Arial"/>
-                        </a:rPr>
-                        <a:t/>
-                      </a:r>
-                    </a:p>
-                  </a:txBody>
-                  <a:tcPr marL="91440" marR="91440" marT="45720" marB="45720">
-                    <a:solidFill>
-                      <a:srgbClr val="FFFFFF"/>
-                    </a:solidFill>
-                  </a:tcPr>
-                </a:tc>
-                <a:tc>
-                  <a:txBody>
-                    <a:bodyPr/>
-                    <a:lstStyle/>
-                    <a:p>
-                      <a:r>
-                        <a:rPr sz="1200" b="0">
-                          <a:solidFill>
-                            <a:srgbClr val="233746"/>
-                          </a:solidFill>
-                          <a:latin typeface="Arial"/>
-                          <a:ea typeface="Arial"/>
-                          <a:cs typeface="Arial"/>
-                        </a:rPr>
-                        <a:t/>
-                      </a:r>
-                    </a:p>
-                  </a:txBody>
-                  <a:tcPr marL="91440" marR="91440" marT="45720" marB="45720">
-                    <a:solidFill>
-                      <a:srgbClr val="FFFFFF"/>
-                    </a:solidFill>
-                  </a:tcPr>
-                </a:tc>
-              </a:tr>
-              <a:tr h="446484">
-                <a:tc>
-                  <a:txBody>
-                    <a:bodyPr/>
-                    <a:lstStyle/>
-                    <a:p>
-                      <a:r>
-                        <a:rPr sz="1200" b="0">
-                          <a:solidFill>
-                            <a:srgbClr val="233746"/>
-                          </a:solidFill>
-                          <a:latin typeface="Arial"/>
-                          <a:ea typeface="Arial"/>
-                          <a:cs typeface="Arial"/>
-                        </a:rPr>
-                        <a:t>Preparación de la defensa</a:t>
-                      </a:r>
-                    </a:p>
-                  </a:txBody>
-                  <a:tcPr marL="91440" marR="91440" marT="45720" marB="45720">
-                    <a:solidFill>
-                      <a:srgbClr val="FFF3E8"/>
-                    </a:solidFill>
-                  </a:tcPr>
-                </a:tc>
-                <a:tc>
-                  <a:txBody>
-                    <a:bodyPr/>
-                    <a:lstStyle/>
-                    <a:p>
-                      <a:r>
-                        <a:rPr sz="1200" b="0">
-                          <a:solidFill>
-                            <a:srgbClr val="233746"/>
-                          </a:solidFill>
-                          <a:latin typeface="Arial"/>
-                          <a:ea typeface="Arial"/>
-                          <a:cs typeface="Arial"/>
-                        </a:rPr>
-                        <a:t>A y B</a:t>
-                      </a:r>
-                    </a:p>
-                  </a:txBody>
-                  <a:tcPr marL="91440" marR="91440" marT="45720" marB="45720">
-                    <a:solidFill>
-                      <a:srgbClr val="FFF3E8"/>
-                    </a:solidFill>
-                  </a:tcPr>
-                </a:tc>
-                <a:tc>
-                  <a:txBody>
-                    <a:bodyPr/>
-                    <a:lstStyle/>
-                    <a:p>
-                      <a:r>
-                        <a:rPr sz="1200" b="0">
-                          <a:solidFill>
-                            <a:srgbClr val="233746"/>
-                          </a:solidFill>
-                          <a:latin typeface="Arial"/>
-                          <a:ea typeface="Arial"/>
-                          <a:cs typeface="Arial"/>
-                        </a:rPr>
-                        <a:t/>
                       </a:r>
                     </a:p>
                   </a:txBody>
@@ -9226,7 +8245,7 @@
         </p:nvSpPr>
         <p:spPr>
           <a:xfrm xmlns:a="http://schemas.openxmlformats.org/drawingml/2006/main">
-            <a:off x="609600" y="5648325"/>
+            <a:off x="609600" y="5381625"/>
             <a:ext cx="10972800" cy="314325"/>
           </a:xfrm>
           <a:prstGeom xmlns:a="http://schemas.openxmlformats.org/drawingml/2006/main" prst="rect">
@@ -9263,6 +8282,86 @@
                 <a:cs typeface="Arial"/>
               </a:rPr>
               <a:t>Naranja: trabajo previsto · ● Entrega o defensa · S: sesión</a:t>
+            </a:r>
+          </a:p>
+        </p:txBody>
+      </p:sp>
+      <p:sp>
+        <p:nvSpPr>
+          <p:cNvPr id="18" name="">
+            <a:extLst xmlns:a="http://schemas.openxmlformats.org/drawingml/2006/main">
+              <a:ext uri="{FF2B5EF4-FFF2-40B4-BE49-F238E27FC236}">
+                <a16:creationId xmlns:a16="http://schemas.microsoft.com/office/drawing/2014/main" id="{AA7078CF-EDFE-451C-B762-6685FD446A7A}"/>
+              </a:ext>
+            </a:extLst>
+          </p:cNvPr>
+          <p:cNvSpPr>
+            <a:spLocks xmlns:a="http://schemas.openxmlformats.org/drawingml/2006/main" noGrp="1"/>
+          </p:cNvSpPr>
+          <p:nvPr/>
+        </p:nvSpPr>
+        <p:spPr>
+          <a:xfrm xmlns:a="http://schemas.openxmlformats.org/drawingml/2006/main">
+            <a:off x="609600" y="5810250"/>
+            <a:ext cx="10972800" cy="552450"/>
+          </a:xfrm>
+          <a:prstGeom xmlns:a="http://schemas.openxmlformats.org/drawingml/2006/main" prst="rect">
+            <a:avLst/>
+          </a:prstGeom>
+          <a:noFill xmlns:a="http://schemas.openxmlformats.org/drawingml/2006/main"/>
+          <a:ln xmlns:a="http://schemas.openxmlformats.org/drawingml/2006/main" w="0">
+            <a:noFill/>
+          </a:ln>
+        </p:spPr>
+        <p:txBody>
+          <a:bodyPr xmlns:a="http://schemas.openxmlformats.org/drawingml/2006/main">
+            <a:noAutofit/>
+          </a:bodyPr>
+          <a:lstStyle xmlns:a="http://schemas.openxmlformats.org/drawingml/2006/main"/>
+          <a:p xmlns:a="http://schemas.openxmlformats.org/drawingml/2006/main">
+            <a:pPr>
+              <a:defRPr sz="1500">
+                <a:solidFill>
+                  <a:srgbClr val="253B4A"/>
+                </a:solidFill>
+                <a:latin typeface="Arial"/>
+                <a:ea typeface="Arial"/>
+                <a:cs typeface="Arial"/>
+              </a:defRPr>
+            </a:pPr>
+            <a:r>
+              <a:rPr sz="1500">
+                <a:solidFill>
+                  <a:srgbClr val="253B4A"/>
+                </a:solidFill>
+                <a:latin typeface="Arial"/>
+                <a:ea typeface="Arial"/>
+                <a:cs typeface="Arial"/>
+              </a:rPr>
+              <a:t>Punto de partida (S4): tema elegido y plan inicial entregado.</a:t>
+            </a:r>
+          </a:p>
+          <a:p xmlns:a="http://schemas.openxmlformats.org/drawingml/2006/main">
+            <a:pPr>
+              <a:defRPr sz="1500">
+                <a:solidFill>
+                  <a:srgbClr val="253B4A"/>
+                </a:solidFill>
+                <a:latin typeface="Arial"/>
+                <a:ea typeface="Arial"/>
+                <a:cs typeface="Arial"/>
+              </a:defRPr>
+            </a:pPr>
+            <a:r>
+              <a:rPr sz="1500">
+                <a:solidFill>
+                  <a:srgbClr val="253B4A"/>
+                </a:solidFill>
+                <a:latin typeface="Arial"/>
+                <a:ea typeface="Arial"/>
+                <a:cs typeface="Arial"/>
+              </a:rPr>
+              <a:t>El Gantt representa el trabajo pendiente desde esa entrega.</a:t>
             </a:r>
           </a:p>
         </p:txBody>
@@ -9522,7 +8621,7 @@
                 <a:ea typeface="Arial"/>
                 <a:cs typeface="Arial"/>
               </a:rPr>
-              <a:t>12</a:t>
+              <a:t>13</a:t>
             </a:r>
           </a:p>
         </p:txBody>
@@ -10010,7 +9109,7 @@
                 <a:ea typeface="Arial"/>
                 <a:cs typeface="Arial"/>
               </a:rPr>
-              <a:t>13</a:t>
+              <a:t>14</a:t>
             </a:r>
           </a:p>
         </p:txBody>
@@ -10876,6 +9975,1110 @@
     <p:extLst>
       <p:ext uri="{BB962C8B-B14F-4D97-AF65-F5344CB8AC3E}">
         <p14:creationId xmlns:p14="http://schemas.microsoft.com/office/powerpoint/2010/main" val="1366151956"/>
+      </p:ext>
+    </p:extLst>
+  </p:cSld>
+</p:sld>
+</file>
+
+<file path=ppt/slides/slide14.xml><?xml version="1.0" encoding="utf-8"?>
+<p:sld xmlns:p="http://schemas.openxmlformats.org/presentationml/2006/main">
+  <p:cSld>
+    <p:bg>
+      <p:bgPr>
+        <a:solidFill xmlns:a="http://schemas.openxmlformats.org/drawingml/2006/main">
+          <a:srgbClr val="FFFFFF"/>
+        </a:solidFill>
+      </p:bgPr>
+    </p:bg>
+    <p:spTree>
+      <p:nvGrpSpPr>
+        <p:cNvPr id="1" name=""/>
+        <p:cNvGrpSpPr/>
+        <p:nvPr/>
+      </p:nvGrpSpPr>
+      <p:grpSpPr>
+        <a:xfrm xmlns:a="http://schemas.openxmlformats.org/drawingml/2006/main"/>
+      </p:grpSpPr>
+      <p:sp>
+        <p:nvSpPr>
+          <p:cNvPr id="20" name="">
+            <a:extLst xmlns:a="http://schemas.openxmlformats.org/drawingml/2006/main">
+              <a:ext uri="{FF2B5EF4-FFF2-40B4-BE49-F238E27FC236}">
+                <a16:creationId xmlns:a16="http://schemas.microsoft.com/office/drawing/2014/main" id="{F6D84292-CF77-49F8-98AC-A43E01B6CB69}"/>
+              </a:ext>
+            </a:extLst>
+          </p:cNvPr>
+          <p:cNvSpPr>
+            <a:spLocks xmlns:a="http://schemas.openxmlformats.org/drawingml/2006/main" noGrp="1"/>
+          </p:cNvSpPr>
+          <p:nvPr/>
+        </p:nvSpPr>
+        <p:spPr>
+          <a:xfrm xmlns:a="http://schemas.openxmlformats.org/drawingml/2006/main">
+            <a:off x="0" y="0"/>
+            <a:ext cx="12192000" cy="247650"/>
+          </a:xfrm>
+          <a:prstGeom xmlns:a="http://schemas.openxmlformats.org/drawingml/2006/main" prst="rect">
+            <a:avLst/>
+          </a:prstGeom>
+          <a:solidFill xmlns:a="http://schemas.openxmlformats.org/drawingml/2006/main">
+            <a:srgbClr val="DE690D"/>
+          </a:solidFill>
+          <a:ln xmlns:a="http://schemas.openxmlformats.org/drawingml/2006/main" w="0">
+            <a:noFill/>
+          </a:ln>
+        </p:spPr>
+      </p:sp>
+      <p:sp>
+        <p:nvSpPr>
+          <p:cNvPr id="2" name="">
+            <a:extLst xmlns:a="http://schemas.openxmlformats.org/drawingml/2006/main">
+              <a:ext uri="{FF2B5EF4-FFF2-40B4-BE49-F238E27FC236}">
+                <a16:creationId xmlns:a16="http://schemas.microsoft.com/office/drawing/2014/main" id="{8CB356E9-0DC3-48E2-BAE4-C940298A0588}"/>
+              </a:ext>
+            </a:extLst>
+          </p:cNvPr>
+          <p:cNvSpPr>
+            <a:spLocks xmlns:a="http://schemas.openxmlformats.org/drawingml/2006/main" noGrp="1"/>
+          </p:cNvSpPr>
+          <p:nvPr/>
+        </p:nvSpPr>
+        <p:spPr>
+          <a:xfrm xmlns:a="http://schemas.openxmlformats.org/drawingml/2006/main">
+            <a:off x="0" y="6591300"/>
+            <a:ext cx="12192000" cy="266700"/>
+          </a:xfrm>
+          <a:prstGeom xmlns:a="http://schemas.openxmlformats.org/drawingml/2006/main" prst="rect">
+            <a:avLst/>
+          </a:prstGeom>
+          <a:solidFill xmlns:a="http://schemas.openxmlformats.org/drawingml/2006/main">
+            <a:srgbClr val="DE690D"/>
+          </a:solidFill>
+          <a:ln xmlns:a="http://schemas.openxmlformats.org/drawingml/2006/main" w="0">
+            <a:noFill/>
+          </a:ln>
+        </p:spPr>
+      </p:sp>
+      <p:sp>
+        <p:nvSpPr>
+          <p:cNvPr id="3" name="">
+            <a:extLst xmlns:a="http://schemas.openxmlformats.org/drawingml/2006/main">
+              <a:ext uri="{FF2B5EF4-FFF2-40B4-BE49-F238E27FC236}">
+                <a16:creationId xmlns:a16="http://schemas.microsoft.com/office/drawing/2014/main" id="{43C8BB62-AF8A-48F2-B4EE-4184629B3040}"/>
+              </a:ext>
+            </a:extLst>
+          </p:cNvPr>
+          <p:cNvSpPr>
+            <a:spLocks xmlns:a="http://schemas.openxmlformats.org/drawingml/2006/main" noGrp="1"/>
+          </p:cNvSpPr>
+          <p:nvPr/>
+        </p:nvSpPr>
+        <p:spPr>
+          <a:xfrm xmlns:a="http://schemas.openxmlformats.org/drawingml/2006/main">
+            <a:off x="609600" y="47625"/>
+            <a:ext cx="10477500" cy="171450"/>
+          </a:xfrm>
+          <a:prstGeom xmlns:a="http://schemas.openxmlformats.org/drawingml/2006/main" prst="rect">
+            <a:avLst/>
+          </a:prstGeom>
+          <a:noFill xmlns:a="http://schemas.openxmlformats.org/drawingml/2006/main"/>
+          <a:ln xmlns:a="http://schemas.openxmlformats.org/drawingml/2006/main" w="0">
+            <a:noFill/>
+          </a:ln>
+        </p:spPr>
+        <p:txBody>
+          <a:bodyPr xmlns:a="http://schemas.openxmlformats.org/drawingml/2006/main">
+            <a:noAutofit/>
+          </a:bodyPr>
+          <a:lstStyle xmlns:a="http://schemas.openxmlformats.org/drawingml/2006/main"/>
+          <a:p xmlns:a="http://schemas.openxmlformats.org/drawingml/2006/main">
+            <a:pPr>
+              <a:defRPr sz="825" b="0">
+                <a:solidFill>
+                  <a:srgbClr val="FFFFFF"/>
+                </a:solidFill>
+                <a:latin typeface="Arial"/>
+                <a:ea typeface="Arial"/>
+                <a:cs typeface="Arial"/>
+              </a:defRPr>
+            </a:pPr>
+            <a:r>
+              <a:rPr sz="825" b="0">
+                <a:solidFill>
+                  <a:srgbClr val="FFFFFF"/>
+                </a:solidFill>
+                <a:latin typeface="Arial"/>
+                <a:ea typeface="Arial"/>
+                <a:cs typeface="Arial"/>
+              </a:rPr>
+              <a:t>Razonamiento con Incertidumbre · Planificación del proyecto</a:t>
+            </a:r>
+          </a:p>
+        </p:txBody>
+      </p:sp>
+      <p:sp>
+        <p:nvSpPr>
+          <p:cNvPr id="4" name="">
+            <a:extLst xmlns:a="http://schemas.openxmlformats.org/drawingml/2006/main">
+              <a:ext uri="{FF2B5EF4-FFF2-40B4-BE49-F238E27FC236}">
+                <a16:creationId xmlns:a16="http://schemas.microsoft.com/office/drawing/2014/main" id="{8F1F514D-556C-4E5A-A4A9-984BE60B9DCA}"/>
+              </a:ext>
+            </a:extLst>
+          </p:cNvPr>
+          <p:cNvSpPr>
+            <a:spLocks xmlns:a="http://schemas.openxmlformats.org/drawingml/2006/main" noGrp="1"/>
+          </p:cNvSpPr>
+          <p:nvPr/>
+        </p:nvSpPr>
+        <p:spPr>
+          <a:xfrm xmlns:a="http://schemas.openxmlformats.org/drawingml/2006/main">
+            <a:off x="609600" y="6648450"/>
+            <a:ext cx="9048750" cy="142875"/>
+          </a:xfrm>
+          <a:prstGeom xmlns:a="http://schemas.openxmlformats.org/drawingml/2006/main" prst="rect">
+            <a:avLst/>
+          </a:prstGeom>
+          <a:noFill xmlns:a="http://schemas.openxmlformats.org/drawingml/2006/main"/>
+          <a:ln xmlns:a="http://schemas.openxmlformats.org/drawingml/2006/main" w="0">
+            <a:noFill/>
+          </a:ln>
+        </p:spPr>
+        <p:txBody>
+          <a:bodyPr xmlns:a="http://schemas.openxmlformats.org/drawingml/2006/main">
+            <a:noAutofit/>
+          </a:bodyPr>
+          <a:lstStyle xmlns:a="http://schemas.openxmlformats.org/drawingml/2006/main"/>
+          <a:p xmlns:a="http://schemas.openxmlformats.org/drawingml/2006/main">
+            <a:pPr>
+              <a:defRPr sz="675" b="0">
+                <a:solidFill>
+                  <a:srgbClr val="FFFFFF"/>
+                </a:solidFill>
+                <a:latin typeface="Arial"/>
+                <a:ea typeface="Arial"/>
+                <a:cs typeface="Arial"/>
+              </a:defRPr>
+            </a:pPr>
+            <a:r>
+              <a:rPr sz="675" b="0">
+                <a:solidFill>
+                  <a:srgbClr val="FFFFFF"/>
+                </a:solidFill>
+                <a:latin typeface="Arial"/>
+                <a:ea typeface="Arial"/>
+                <a:cs typeface="Arial"/>
+              </a:rPr>
+              <a:t>Erik Figueiral Alonso</a:t>
+            </a:r>
+          </a:p>
+        </p:txBody>
+      </p:sp>
+      <p:sp>
+        <p:nvSpPr>
+          <p:cNvPr id="5" name="">
+            <a:extLst xmlns:a="http://schemas.openxmlformats.org/drawingml/2006/main">
+              <a:ext uri="{FF2B5EF4-FFF2-40B4-BE49-F238E27FC236}">
+                <a16:creationId xmlns:a16="http://schemas.microsoft.com/office/drawing/2014/main" id="{EC98256A-9FB7-439F-B2E6-C6FCD3E3FA01}"/>
+              </a:ext>
+            </a:extLst>
+          </p:cNvPr>
+          <p:cNvSpPr>
+            <a:spLocks xmlns:a="http://schemas.openxmlformats.org/drawingml/2006/main" noGrp="1"/>
+          </p:cNvSpPr>
+          <p:nvPr/>
+        </p:nvSpPr>
+        <p:spPr>
+          <a:xfrm xmlns:a="http://schemas.openxmlformats.org/drawingml/2006/main">
+            <a:off x="11334750" y="6648450"/>
+            <a:ext cx="428625" cy="152400"/>
+          </a:xfrm>
+          <a:prstGeom xmlns:a="http://schemas.openxmlformats.org/drawingml/2006/main" prst="rect">
+            <a:avLst/>
+          </a:prstGeom>
+          <a:noFill xmlns:a="http://schemas.openxmlformats.org/drawingml/2006/main"/>
+          <a:ln xmlns:a="http://schemas.openxmlformats.org/drawingml/2006/main" w="0">
+            <a:noFill/>
+          </a:ln>
+        </p:spPr>
+        <p:txBody>
+          <a:bodyPr xmlns:a="http://schemas.openxmlformats.org/drawingml/2006/main">
+            <a:noAutofit/>
+          </a:bodyPr>
+          <a:lstStyle xmlns:a="http://schemas.openxmlformats.org/drawingml/2006/main"/>
+          <a:p xmlns:a="http://schemas.openxmlformats.org/drawingml/2006/main">
+            <a:pPr>
+              <a:defRPr sz="675" b="0">
+                <a:solidFill>
+                  <a:srgbClr val="FFFFFF"/>
+                </a:solidFill>
+                <a:latin typeface="Arial"/>
+                <a:ea typeface="Arial"/>
+                <a:cs typeface="Arial"/>
+              </a:defRPr>
+            </a:pPr>
+            <a:r>
+              <a:rPr sz="675" b="0">
+                <a:solidFill>
+                  <a:srgbClr val="FFFFFF"/>
+                </a:solidFill>
+                <a:latin typeface="Arial"/>
+                <a:ea typeface="Arial"/>
+                <a:cs typeface="Arial"/>
+              </a:rPr>
+              <a:t>12</a:t>
+            </a:r>
+          </a:p>
+        </p:txBody>
+      </p:sp>
+      <p:sp>
+        <p:nvSpPr>
+          <p:cNvPr id="6" name="">
+            <a:extLst xmlns:a="http://schemas.openxmlformats.org/drawingml/2006/main">
+              <a:ext uri="{FF2B5EF4-FFF2-40B4-BE49-F238E27FC236}">
+                <a16:creationId xmlns:a16="http://schemas.microsoft.com/office/drawing/2014/main" id="{D5FB36E7-FFC2-4D43-97DE-57CF35EB2E38}"/>
+              </a:ext>
+            </a:extLst>
+          </p:cNvPr>
+          <p:cNvSpPr>
+            <a:spLocks xmlns:a="http://schemas.openxmlformats.org/drawingml/2006/main" noGrp="1"/>
+          </p:cNvSpPr>
+          <p:nvPr/>
+        </p:nvSpPr>
+        <p:spPr>
+          <a:xfrm xmlns:a="http://schemas.openxmlformats.org/drawingml/2006/main">
+            <a:off x="609600" y="647700"/>
+            <a:ext cx="10972800" cy="685800"/>
+          </a:xfrm>
+          <a:prstGeom xmlns:a="http://schemas.openxmlformats.org/drawingml/2006/main" prst="rect">
+            <a:avLst/>
+          </a:prstGeom>
+          <a:noFill xmlns:a="http://schemas.openxmlformats.org/drawingml/2006/main"/>
+          <a:ln xmlns:a="http://schemas.openxmlformats.org/drawingml/2006/main" w="0">
+            <a:noFill/>
+          </a:ln>
+        </p:spPr>
+        <p:txBody>
+          <a:bodyPr xmlns:a="http://schemas.openxmlformats.org/drawingml/2006/main">
+            <a:noAutofit/>
+          </a:bodyPr>
+          <a:lstStyle xmlns:a="http://schemas.openxmlformats.org/drawingml/2006/main"/>
+          <a:p xmlns:a="http://schemas.openxmlformats.org/drawingml/2006/main">
+            <a:pPr>
+              <a:defRPr sz="3000" b="0">
+                <a:solidFill>
+                  <a:srgbClr val="DE690D"/>
+                </a:solidFill>
+                <a:latin typeface="Arial"/>
+                <a:ea typeface="Arial"/>
+                <a:cs typeface="Arial"/>
+              </a:defRPr>
+            </a:pPr>
+            <a:r>
+              <a:rPr sz="3000" b="0">
+                <a:solidFill>
+                  <a:srgbClr val="DE690D"/>
+                </a:solidFill>
+                <a:latin typeface="Arial"/>
+                <a:ea typeface="Arial"/>
+                <a:cs typeface="Arial"/>
+              </a:rPr>
+              <a:t>Tareas según el tipo de proyecto</a:t>
+            </a:r>
+          </a:p>
+        </p:txBody>
+      </p:sp>
+      <p:sp>
+        <p:nvSpPr>
+          <p:cNvPr id="7" name="">
+            <a:extLst xmlns:a="http://schemas.openxmlformats.org/drawingml/2006/main">
+              <a:ext uri="{FF2B5EF4-FFF2-40B4-BE49-F238E27FC236}">
+                <a16:creationId xmlns:a16="http://schemas.microsoft.com/office/drawing/2014/main" id="{30FFB9A3-7201-4EE6-919C-695481681539}"/>
+              </a:ext>
+            </a:extLst>
+          </p:cNvPr>
+          <p:cNvSpPr>
+            <a:spLocks xmlns:a="http://schemas.openxmlformats.org/drawingml/2006/main" noGrp="1"/>
+          </p:cNvSpPr>
+          <p:nvPr/>
+        </p:nvSpPr>
+        <p:spPr>
+          <a:xfrm xmlns:a="http://schemas.openxmlformats.org/drawingml/2006/main">
+            <a:off x="609600" y="1390650"/>
+            <a:ext cx="10972800" cy="619125"/>
+          </a:xfrm>
+          <a:prstGeom xmlns:a="http://schemas.openxmlformats.org/drawingml/2006/main" prst="rect">
+            <a:avLst/>
+          </a:prstGeom>
+          <a:noFill xmlns:a="http://schemas.openxmlformats.org/drawingml/2006/main"/>
+          <a:ln xmlns:a="http://schemas.openxmlformats.org/drawingml/2006/main" w="0">
+            <a:noFill/>
+          </a:ln>
+        </p:spPr>
+        <p:txBody>
+          <a:bodyPr xmlns:a="http://schemas.openxmlformats.org/drawingml/2006/main">
+            <a:noAutofit/>
+          </a:bodyPr>
+          <a:lstStyle xmlns:a="http://schemas.openxmlformats.org/drawingml/2006/main"/>
+          <a:p xmlns:a="http://schemas.openxmlformats.org/drawingml/2006/main">
+            <a:pPr>
+              <a:defRPr sz="1875" b="0">
+                <a:solidFill>
+                  <a:srgbClr val="253B4A"/>
+                </a:solidFill>
+                <a:latin typeface="Arial"/>
+                <a:ea typeface="Arial"/>
+                <a:cs typeface="Arial"/>
+              </a:defRPr>
+            </a:pPr>
+            <a:r>
+              <a:rPr sz="1875" b="0">
+                <a:solidFill>
+                  <a:srgbClr val="253B4A"/>
+                </a:solidFill>
+                <a:latin typeface="Arial"/>
+                <a:ea typeface="Arial"/>
+                <a:cs typeface="Arial"/>
+              </a:rPr>
+              <a:t>Los Gantt anteriores son ejemplos. Añadid tareas concretas según vuestro sistema.</a:t>
+            </a:r>
+          </a:p>
+        </p:txBody>
+      </p:sp>
+      <p:sp>
+        <p:nvSpPr>
+          <p:cNvPr id="8" name="">
+            <a:extLst xmlns:a="http://schemas.openxmlformats.org/drawingml/2006/main">
+              <a:ext uri="{FF2B5EF4-FFF2-40B4-BE49-F238E27FC236}">
+                <a16:creationId xmlns:a16="http://schemas.microsoft.com/office/drawing/2014/main" id="{3CE9FA86-3C95-4F8F-AA05-70A66D7D8381}"/>
+              </a:ext>
+            </a:extLst>
+          </p:cNvPr>
+          <p:cNvSpPr>
+            <a:spLocks xmlns:a="http://schemas.openxmlformats.org/drawingml/2006/main" noGrp="1"/>
+          </p:cNvSpPr>
+          <p:nvPr/>
+        </p:nvSpPr>
+        <p:spPr>
+          <a:xfrm xmlns:a="http://schemas.openxmlformats.org/drawingml/2006/main">
+            <a:off x="609600" y="2133600"/>
+            <a:ext cx="5048250" cy="400050"/>
+          </a:xfrm>
+          <a:prstGeom xmlns:a="http://schemas.openxmlformats.org/drawingml/2006/main" prst="rect">
+            <a:avLst/>
+          </a:prstGeom>
+          <a:noFill xmlns:a="http://schemas.openxmlformats.org/drawingml/2006/main"/>
+          <a:ln xmlns:a="http://schemas.openxmlformats.org/drawingml/2006/main" w="0">
+            <a:noFill/>
+          </a:ln>
+        </p:spPr>
+        <p:txBody>
+          <a:bodyPr xmlns:a="http://schemas.openxmlformats.org/drawingml/2006/main">
+            <a:noAutofit/>
+          </a:bodyPr>
+          <a:lstStyle xmlns:a="http://schemas.openxmlformats.org/drawingml/2006/main"/>
+          <a:p xmlns:a="http://schemas.openxmlformats.org/drawingml/2006/main">
+            <a:pPr>
+              <a:defRPr sz="2175" b="1">
+                <a:solidFill>
+                  <a:srgbClr val="DE690D"/>
+                </a:solidFill>
+                <a:latin typeface="Arial"/>
+                <a:ea typeface="Arial"/>
+                <a:cs typeface="Arial"/>
+              </a:defRPr>
+            </a:pPr>
+            <a:r>
+              <a:rPr sz="2175" b="1">
+                <a:solidFill>
+                  <a:srgbClr val="DE690D"/>
+                </a:solidFill>
+                <a:latin typeface="Arial"/>
+                <a:ea typeface="Arial"/>
+                <a:cs typeface="Arial"/>
+              </a:rPr>
+              <a:t>Control difuso</a:t>
+            </a:r>
+          </a:p>
+        </p:txBody>
+      </p:sp>
+      <p:sp>
+        <p:nvSpPr>
+          <p:cNvPr id="9" name="">
+            <a:extLst xmlns:a="http://schemas.openxmlformats.org/drawingml/2006/main">
+              <a:ext uri="{FF2B5EF4-FFF2-40B4-BE49-F238E27FC236}">
+                <a16:creationId xmlns:a16="http://schemas.microsoft.com/office/drawing/2014/main" id="{A7C60B6C-14FE-4653-AB63-82195B02364D}"/>
+              </a:ext>
+            </a:extLst>
+          </p:cNvPr>
+          <p:cNvSpPr>
+            <a:spLocks xmlns:a="http://schemas.openxmlformats.org/drawingml/2006/main" noGrp="1"/>
+          </p:cNvSpPr>
+          <p:nvPr/>
+        </p:nvSpPr>
+        <p:spPr>
+          <a:xfrm xmlns:a="http://schemas.openxmlformats.org/drawingml/2006/main">
+            <a:off x="6362700" y="2133600"/>
+            <a:ext cx="5219700" cy="400050"/>
+          </a:xfrm>
+          <a:prstGeom xmlns:a="http://schemas.openxmlformats.org/drawingml/2006/main" prst="rect">
+            <a:avLst/>
+          </a:prstGeom>
+          <a:noFill xmlns:a="http://schemas.openxmlformats.org/drawingml/2006/main"/>
+          <a:ln xmlns:a="http://schemas.openxmlformats.org/drawingml/2006/main" w="0">
+            <a:noFill/>
+          </a:ln>
+        </p:spPr>
+        <p:txBody>
+          <a:bodyPr xmlns:a="http://schemas.openxmlformats.org/drawingml/2006/main">
+            <a:noAutofit/>
+          </a:bodyPr>
+          <a:lstStyle xmlns:a="http://schemas.openxmlformats.org/drawingml/2006/main"/>
+          <a:p xmlns:a="http://schemas.openxmlformats.org/drawingml/2006/main">
+            <a:pPr>
+              <a:defRPr sz="2175" b="1">
+                <a:solidFill>
+                  <a:srgbClr val="DE690D"/>
+                </a:solidFill>
+                <a:latin typeface="Arial"/>
+                <a:ea typeface="Arial"/>
+                <a:cs typeface="Arial"/>
+              </a:defRPr>
+            </a:pPr>
+            <a:r>
+              <a:rPr sz="2175" b="1">
+                <a:solidFill>
+                  <a:srgbClr val="DE690D"/>
+                </a:solidFill>
+                <a:latin typeface="Arial"/>
+                <a:ea typeface="Arial"/>
+                <a:cs typeface="Arial"/>
+              </a:rPr>
+              <a:t>Diagnóstico probabilístico</a:t>
+            </a:r>
+          </a:p>
+        </p:txBody>
+      </p:sp>
+      <p:sp>
+        <p:nvSpPr>
+          <p:cNvPr id="10" name="">
+            <a:extLst xmlns:a="http://schemas.openxmlformats.org/drawingml/2006/main">
+              <a:ext uri="{FF2B5EF4-FFF2-40B4-BE49-F238E27FC236}">
+                <a16:creationId xmlns:a16="http://schemas.microsoft.com/office/drawing/2014/main" id="{4A602DFD-962D-455F-BFD9-5BD4AFB72C0A}"/>
+              </a:ext>
+            </a:extLst>
+          </p:cNvPr>
+          <p:cNvSpPr>
+            <a:spLocks xmlns:a="http://schemas.openxmlformats.org/drawingml/2006/main" noGrp="1"/>
+          </p:cNvSpPr>
+          <p:nvPr/>
+        </p:nvSpPr>
+        <p:spPr>
+          <a:xfrm xmlns:a="http://schemas.openxmlformats.org/drawingml/2006/main">
+            <a:off x="609600" y="2647950"/>
+            <a:ext cx="5143500" cy="419100"/>
+          </a:xfrm>
+          <a:prstGeom xmlns:a="http://schemas.openxmlformats.org/drawingml/2006/main" prst="rect">
+            <a:avLst/>
+          </a:prstGeom>
+          <a:noFill xmlns:a="http://schemas.openxmlformats.org/drawingml/2006/main"/>
+          <a:ln xmlns:a="http://schemas.openxmlformats.org/drawingml/2006/main" w="0">
+            <a:noFill/>
+          </a:ln>
+        </p:spPr>
+        <p:txBody>
+          <a:bodyPr xmlns:a="http://schemas.openxmlformats.org/drawingml/2006/main">
+            <a:noAutofit/>
+          </a:bodyPr>
+          <a:lstStyle xmlns:a="http://schemas.openxmlformats.org/drawingml/2006/main"/>
+          <a:p xmlns:a="http://schemas.openxmlformats.org/drawingml/2006/main">
+            <a:pPr>
+              <a:defRPr sz="1800" b="0">
+                <a:solidFill>
+                  <a:srgbClr val="253B4A"/>
+                </a:solidFill>
+                <a:latin typeface="Arial"/>
+                <a:ea typeface="Arial"/>
+                <a:cs typeface="Arial"/>
+              </a:defRPr>
+            </a:pPr>
+            <a:r>
+              <a:rPr sz="1800" b="0">
+                <a:solidFill>
+                  <a:srgbClr val="253B4A"/>
+                </a:solidFill>
+                <a:latin typeface="Arial"/>
+                <a:ea typeface="Arial"/>
+                <a:cs typeface="Arial"/>
+              </a:rPr>
+              <a:t>Definir entradas, salidas y rangos.</a:t>
+            </a:r>
+          </a:p>
+        </p:txBody>
+      </p:sp>
+      <p:sp>
+        <p:nvSpPr>
+          <p:cNvPr id="11" name="">
+            <a:extLst xmlns:a="http://schemas.openxmlformats.org/drawingml/2006/main">
+              <a:ext uri="{FF2B5EF4-FFF2-40B4-BE49-F238E27FC236}">
+                <a16:creationId xmlns:a16="http://schemas.microsoft.com/office/drawing/2014/main" id="{DE029A46-4DDB-4FF6-878F-89A40EED5530}"/>
+              </a:ext>
+            </a:extLst>
+          </p:cNvPr>
+          <p:cNvSpPr>
+            <a:spLocks xmlns:a="http://schemas.openxmlformats.org/drawingml/2006/main" noGrp="1"/>
+          </p:cNvSpPr>
+          <p:nvPr/>
+        </p:nvSpPr>
+        <p:spPr>
+          <a:xfrm xmlns:a="http://schemas.openxmlformats.org/drawingml/2006/main">
+            <a:off x="609600" y="3114675"/>
+            <a:ext cx="5143500" cy="419100"/>
+          </a:xfrm>
+          <a:prstGeom xmlns:a="http://schemas.openxmlformats.org/drawingml/2006/main" prst="rect">
+            <a:avLst/>
+          </a:prstGeom>
+          <a:noFill xmlns:a="http://schemas.openxmlformats.org/drawingml/2006/main"/>
+          <a:ln xmlns:a="http://schemas.openxmlformats.org/drawingml/2006/main" w="0">
+            <a:noFill/>
+          </a:ln>
+        </p:spPr>
+        <p:txBody>
+          <a:bodyPr xmlns:a="http://schemas.openxmlformats.org/drawingml/2006/main">
+            <a:noAutofit/>
+          </a:bodyPr>
+          <a:lstStyle xmlns:a="http://schemas.openxmlformats.org/drawingml/2006/main"/>
+          <a:p xmlns:a="http://schemas.openxmlformats.org/drawingml/2006/main">
+            <a:pPr>
+              <a:defRPr sz="1800" b="0">
+                <a:solidFill>
+                  <a:srgbClr val="253B4A"/>
+                </a:solidFill>
+                <a:latin typeface="Arial"/>
+                <a:ea typeface="Arial"/>
+                <a:cs typeface="Arial"/>
+              </a:defRPr>
+            </a:pPr>
+            <a:r>
+              <a:rPr sz="1800" b="0">
+                <a:solidFill>
+                  <a:srgbClr val="253B4A"/>
+                </a:solidFill>
+                <a:latin typeface="Arial"/>
+                <a:ea typeface="Arial"/>
+                <a:cs typeface="Arial"/>
+              </a:rPr>
+              <a:t>Diseñar las funciones de pertenencia.</a:t>
+            </a:r>
+          </a:p>
+        </p:txBody>
+      </p:sp>
+      <p:sp>
+        <p:nvSpPr>
+          <p:cNvPr id="12" name="">
+            <a:extLst xmlns:a="http://schemas.openxmlformats.org/drawingml/2006/main">
+              <a:ext uri="{FF2B5EF4-FFF2-40B4-BE49-F238E27FC236}">
+                <a16:creationId xmlns:a16="http://schemas.microsoft.com/office/drawing/2014/main" id="{A533A14A-ACDC-415F-85FB-660CB6591267}"/>
+              </a:ext>
+            </a:extLst>
+          </p:cNvPr>
+          <p:cNvSpPr>
+            <a:spLocks xmlns:a="http://schemas.openxmlformats.org/drawingml/2006/main" noGrp="1"/>
+          </p:cNvSpPr>
+          <p:nvPr/>
+        </p:nvSpPr>
+        <p:spPr>
+          <a:xfrm xmlns:a="http://schemas.openxmlformats.org/drawingml/2006/main">
+            <a:off x="609600" y="3581400"/>
+            <a:ext cx="5143500" cy="419100"/>
+          </a:xfrm>
+          <a:prstGeom xmlns:a="http://schemas.openxmlformats.org/drawingml/2006/main" prst="rect">
+            <a:avLst/>
+          </a:prstGeom>
+          <a:noFill xmlns:a="http://schemas.openxmlformats.org/drawingml/2006/main"/>
+          <a:ln xmlns:a="http://schemas.openxmlformats.org/drawingml/2006/main" w="0">
+            <a:noFill/>
+          </a:ln>
+        </p:spPr>
+        <p:txBody>
+          <a:bodyPr xmlns:a="http://schemas.openxmlformats.org/drawingml/2006/main">
+            <a:noAutofit/>
+          </a:bodyPr>
+          <a:lstStyle xmlns:a="http://schemas.openxmlformats.org/drawingml/2006/main"/>
+          <a:p xmlns:a="http://schemas.openxmlformats.org/drawingml/2006/main">
+            <a:pPr>
+              <a:defRPr sz="1800" b="0">
+                <a:solidFill>
+                  <a:srgbClr val="253B4A"/>
+                </a:solidFill>
+                <a:latin typeface="Arial"/>
+                <a:ea typeface="Arial"/>
+                <a:cs typeface="Arial"/>
+              </a:defRPr>
+            </a:pPr>
+            <a:r>
+              <a:rPr sz="1800" b="0">
+                <a:solidFill>
+                  <a:srgbClr val="253B4A"/>
+                </a:solidFill>
+                <a:latin typeface="Arial"/>
+                <a:ea typeface="Arial"/>
+                <a:cs typeface="Arial"/>
+              </a:rPr>
+              <a:t>Construir y ajustar las reglas de control.</a:t>
+            </a:r>
+          </a:p>
+        </p:txBody>
+      </p:sp>
+      <p:sp>
+        <p:nvSpPr>
+          <p:cNvPr id="13" name="">
+            <a:extLst xmlns:a="http://schemas.openxmlformats.org/drawingml/2006/main">
+              <a:ext uri="{FF2B5EF4-FFF2-40B4-BE49-F238E27FC236}">
+                <a16:creationId xmlns:a16="http://schemas.microsoft.com/office/drawing/2014/main" id="{29F9BE7B-BBF1-4F12-8418-74D234A9F29B}"/>
+              </a:ext>
+            </a:extLst>
+          </p:cNvPr>
+          <p:cNvSpPr>
+            <a:spLocks xmlns:a="http://schemas.openxmlformats.org/drawingml/2006/main" noGrp="1"/>
+          </p:cNvSpPr>
+          <p:nvPr/>
+        </p:nvSpPr>
+        <p:spPr>
+          <a:xfrm xmlns:a="http://schemas.openxmlformats.org/drawingml/2006/main">
+            <a:off x="609600" y="4048125"/>
+            <a:ext cx="5143500" cy="419100"/>
+          </a:xfrm>
+          <a:prstGeom xmlns:a="http://schemas.openxmlformats.org/drawingml/2006/main" prst="rect">
+            <a:avLst/>
+          </a:prstGeom>
+          <a:noFill xmlns:a="http://schemas.openxmlformats.org/drawingml/2006/main"/>
+          <a:ln xmlns:a="http://schemas.openxmlformats.org/drawingml/2006/main" w="0">
+            <a:noFill/>
+          </a:ln>
+        </p:spPr>
+        <p:txBody>
+          <a:bodyPr xmlns:a="http://schemas.openxmlformats.org/drawingml/2006/main">
+            <a:noAutofit/>
+          </a:bodyPr>
+          <a:lstStyle xmlns:a="http://schemas.openxmlformats.org/drawingml/2006/main"/>
+          <a:p xmlns:a="http://schemas.openxmlformats.org/drawingml/2006/main">
+            <a:pPr>
+              <a:defRPr sz="1800" b="0">
+                <a:solidFill>
+                  <a:srgbClr val="253B4A"/>
+                </a:solidFill>
+                <a:latin typeface="Arial"/>
+                <a:ea typeface="Arial"/>
+                <a:cs typeface="Arial"/>
+              </a:defRPr>
+            </a:pPr>
+            <a:r>
+              <a:rPr sz="1800" b="0">
+                <a:solidFill>
+                  <a:srgbClr val="253B4A"/>
+                </a:solidFill>
+                <a:latin typeface="Arial"/>
+                <a:ea typeface="Arial"/>
+                <a:cs typeface="Arial"/>
+              </a:rPr>
+              <a:t>Simular escenarios y evaluar la respuesta.</a:t>
+            </a:r>
+          </a:p>
+        </p:txBody>
+      </p:sp>
+      <p:sp>
+        <p:nvSpPr>
+          <p:cNvPr id="14" name="">
+            <a:extLst xmlns:a="http://schemas.openxmlformats.org/drawingml/2006/main">
+              <a:ext uri="{FF2B5EF4-FFF2-40B4-BE49-F238E27FC236}">
+                <a16:creationId xmlns:a16="http://schemas.microsoft.com/office/drawing/2014/main" id="{A7EA37B3-A9F5-4925-BBD1-3F0585F4033D}"/>
+              </a:ext>
+            </a:extLst>
+          </p:cNvPr>
+          <p:cNvSpPr>
+            <a:spLocks xmlns:a="http://schemas.openxmlformats.org/drawingml/2006/main" noGrp="1"/>
+          </p:cNvSpPr>
+          <p:nvPr/>
+        </p:nvSpPr>
+        <p:spPr>
+          <a:xfrm xmlns:a="http://schemas.openxmlformats.org/drawingml/2006/main">
+            <a:off x="6362700" y="2647950"/>
+            <a:ext cx="5219700" cy="419100"/>
+          </a:xfrm>
+          <a:prstGeom xmlns:a="http://schemas.openxmlformats.org/drawingml/2006/main" prst="rect">
+            <a:avLst/>
+          </a:prstGeom>
+          <a:noFill xmlns:a="http://schemas.openxmlformats.org/drawingml/2006/main"/>
+          <a:ln xmlns:a="http://schemas.openxmlformats.org/drawingml/2006/main" w="0">
+            <a:noFill/>
+          </a:ln>
+        </p:spPr>
+        <p:txBody>
+          <a:bodyPr xmlns:a="http://schemas.openxmlformats.org/drawingml/2006/main">
+            <a:noAutofit/>
+          </a:bodyPr>
+          <a:lstStyle xmlns:a="http://schemas.openxmlformats.org/drawingml/2006/main"/>
+          <a:p xmlns:a="http://schemas.openxmlformats.org/drawingml/2006/main">
+            <a:pPr>
+              <a:defRPr sz="1800" b="0">
+                <a:solidFill>
+                  <a:srgbClr val="253B4A"/>
+                </a:solidFill>
+                <a:latin typeface="Arial"/>
+                <a:ea typeface="Arial"/>
+                <a:cs typeface="Arial"/>
+              </a:defRPr>
+            </a:pPr>
+            <a:r>
+              <a:rPr sz="1800" b="0">
+                <a:solidFill>
+                  <a:srgbClr val="253B4A"/>
+                </a:solidFill>
+                <a:latin typeface="Arial"/>
+                <a:ea typeface="Arial"/>
+                <a:cs typeface="Arial"/>
+              </a:rPr>
+              <a:t>Definir variables y estados.</a:t>
+            </a:r>
+          </a:p>
+        </p:txBody>
+      </p:sp>
+      <p:sp>
+        <p:nvSpPr>
+          <p:cNvPr id="15" name="">
+            <a:extLst xmlns:a="http://schemas.openxmlformats.org/drawingml/2006/main">
+              <a:ext uri="{FF2B5EF4-FFF2-40B4-BE49-F238E27FC236}">
+                <a16:creationId xmlns:a16="http://schemas.microsoft.com/office/drawing/2014/main" id="{86B33AB7-94F6-4949-A6AE-462F6D7912BD}"/>
+              </a:ext>
+            </a:extLst>
+          </p:cNvPr>
+          <p:cNvSpPr>
+            <a:spLocks xmlns:a="http://schemas.openxmlformats.org/drawingml/2006/main" noGrp="1"/>
+          </p:cNvSpPr>
+          <p:nvPr/>
+        </p:nvSpPr>
+        <p:spPr>
+          <a:xfrm xmlns:a="http://schemas.openxmlformats.org/drawingml/2006/main">
+            <a:off x="6362700" y="3114675"/>
+            <a:ext cx="5219700" cy="419100"/>
+          </a:xfrm>
+          <a:prstGeom xmlns:a="http://schemas.openxmlformats.org/drawingml/2006/main" prst="rect">
+            <a:avLst/>
+          </a:prstGeom>
+          <a:noFill xmlns:a="http://schemas.openxmlformats.org/drawingml/2006/main"/>
+          <a:ln xmlns:a="http://schemas.openxmlformats.org/drawingml/2006/main" w="0">
+            <a:noFill/>
+          </a:ln>
+        </p:spPr>
+        <p:txBody>
+          <a:bodyPr xmlns:a="http://schemas.openxmlformats.org/drawingml/2006/main">
+            <a:noAutofit/>
+          </a:bodyPr>
+          <a:lstStyle xmlns:a="http://schemas.openxmlformats.org/drawingml/2006/main"/>
+          <a:p xmlns:a="http://schemas.openxmlformats.org/drawingml/2006/main">
+            <a:pPr>
+              <a:defRPr sz="1800" b="0">
+                <a:solidFill>
+                  <a:srgbClr val="253B4A"/>
+                </a:solidFill>
+                <a:latin typeface="Arial"/>
+                <a:ea typeface="Arial"/>
+                <a:cs typeface="Arial"/>
+              </a:defRPr>
+            </a:pPr>
+            <a:r>
+              <a:rPr sz="1800" b="0">
+                <a:solidFill>
+                  <a:srgbClr val="253B4A"/>
+                </a:solidFill>
+                <a:latin typeface="Arial"/>
+                <a:ea typeface="Arial"/>
+                <a:cs typeface="Arial"/>
+              </a:rPr>
+              <a:t>Diseñar la estructura de la red.</a:t>
+            </a:r>
+          </a:p>
+        </p:txBody>
+      </p:sp>
+      <p:sp>
+        <p:nvSpPr>
+          <p:cNvPr id="16" name="">
+            <a:extLst xmlns:a="http://schemas.openxmlformats.org/drawingml/2006/main">
+              <a:ext uri="{FF2B5EF4-FFF2-40B4-BE49-F238E27FC236}">
+                <a16:creationId xmlns:a16="http://schemas.microsoft.com/office/drawing/2014/main" id="{B91F3F8E-8A06-47E9-AF4B-FF28710BBD4C}"/>
+              </a:ext>
+            </a:extLst>
+          </p:cNvPr>
+          <p:cNvSpPr>
+            <a:spLocks xmlns:a="http://schemas.openxmlformats.org/drawingml/2006/main" noGrp="1"/>
+          </p:cNvSpPr>
+          <p:nvPr/>
+        </p:nvSpPr>
+        <p:spPr>
+          <a:xfrm xmlns:a="http://schemas.openxmlformats.org/drawingml/2006/main">
+            <a:off x="6362700" y="3581400"/>
+            <a:ext cx="5219700" cy="419100"/>
+          </a:xfrm>
+          <a:prstGeom xmlns:a="http://schemas.openxmlformats.org/drawingml/2006/main" prst="rect">
+            <a:avLst/>
+          </a:prstGeom>
+          <a:noFill xmlns:a="http://schemas.openxmlformats.org/drawingml/2006/main"/>
+          <a:ln xmlns:a="http://schemas.openxmlformats.org/drawingml/2006/main" w="0">
+            <a:noFill/>
+          </a:ln>
+        </p:spPr>
+        <p:txBody>
+          <a:bodyPr xmlns:a="http://schemas.openxmlformats.org/drawingml/2006/main">
+            <a:noAutofit/>
+          </a:bodyPr>
+          <a:lstStyle xmlns:a="http://schemas.openxmlformats.org/drawingml/2006/main"/>
+          <a:p xmlns:a="http://schemas.openxmlformats.org/drawingml/2006/main">
+            <a:pPr>
+              <a:defRPr sz="1800" b="0">
+                <a:solidFill>
+                  <a:srgbClr val="253B4A"/>
+                </a:solidFill>
+                <a:latin typeface="Arial"/>
+                <a:ea typeface="Arial"/>
+                <a:cs typeface="Arial"/>
+              </a:defRPr>
+            </a:pPr>
+            <a:r>
+              <a:rPr sz="1800" b="0">
+                <a:solidFill>
+                  <a:srgbClr val="253B4A"/>
+                </a:solidFill>
+                <a:latin typeface="Arial"/>
+                <a:ea typeface="Arial"/>
+                <a:cs typeface="Arial"/>
+              </a:rPr>
+              <a:t>Estimar las probabilidades del modelo.</a:t>
+            </a:r>
+          </a:p>
+        </p:txBody>
+      </p:sp>
+      <p:sp>
+        <p:nvSpPr>
+          <p:cNvPr id="17" name="">
+            <a:extLst xmlns:a="http://schemas.openxmlformats.org/drawingml/2006/main">
+              <a:ext uri="{FF2B5EF4-FFF2-40B4-BE49-F238E27FC236}">
+                <a16:creationId xmlns:a16="http://schemas.microsoft.com/office/drawing/2014/main" id="{33069C09-D133-417B-8881-96E64CFA96E5}"/>
+              </a:ext>
+            </a:extLst>
+          </p:cNvPr>
+          <p:cNvSpPr>
+            <a:spLocks xmlns:a="http://schemas.openxmlformats.org/drawingml/2006/main" noGrp="1"/>
+          </p:cNvSpPr>
+          <p:nvPr/>
+        </p:nvSpPr>
+        <p:spPr>
+          <a:xfrm xmlns:a="http://schemas.openxmlformats.org/drawingml/2006/main">
+            <a:off x="6362700" y="4048125"/>
+            <a:ext cx="5219700" cy="419100"/>
+          </a:xfrm>
+          <a:prstGeom xmlns:a="http://schemas.openxmlformats.org/drawingml/2006/main" prst="rect">
+            <a:avLst/>
+          </a:prstGeom>
+          <a:noFill xmlns:a="http://schemas.openxmlformats.org/drawingml/2006/main"/>
+          <a:ln xmlns:a="http://schemas.openxmlformats.org/drawingml/2006/main" w="0">
+            <a:noFill/>
+          </a:ln>
+        </p:spPr>
+        <p:txBody>
+          <a:bodyPr xmlns:a="http://schemas.openxmlformats.org/drawingml/2006/main">
+            <a:noAutofit/>
+          </a:bodyPr>
+          <a:lstStyle xmlns:a="http://schemas.openxmlformats.org/drawingml/2006/main"/>
+          <a:p xmlns:a="http://schemas.openxmlformats.org/drawingml/2006/main">
+            <a:pPr>
+              <a:defRPr sz="1800" b="0">
+                <a:solidFill>
+                  <a:srgbClr val="253B4A"/>
+                </a:solidFill>
+                <a:latin typeface="Arial"/>
+                <a:ea typeface="Arial"/>
+                <a:cs typeface="Arial"/>
+              </a:defRPr>
+            </a:pPr>
+            <a:r>
+              <a:rPr sz="1800" b="0">
+                <a:solidFill>
+                  <a:srgbClr val="253B4A"/>
+                </a:solidFill>
+                <a:latin typeface="Arial"/>
+                <a:ea typeface="Arial"/>
+                <a:cs typeface="Arial"/>
+              </a:rPr>
+              <a:t>Validar el diagnóstico con casos de prueba.</a:t>
+            </a:r>
+          </a:p>
+        </p:txBody>
+      </p:sp>
+      <p:sp>
+        <p:nvSpPr>
+          <p:cNvPr id="18" name="">
+            <a:extLst xmlns:a="http://schemas.openxmlformats.org/drawingml/2006/main">
+              <a:ext uri="{FF2B5EF4-FFF2-40B4-BE49-F238E27FC236}">
+                <a16:creationId xmlns:a16="http://schemas.microsoft.com/office/drawing/2014/main" id="{9110D9AF-10A6-444C-9DA9-2B8CC51CA70D}"/>
+              </a:ext>
+            </a:extLst>
+          </p:cNvPr>
+          <p:cNvSpPr>
+            <a:spLocks xmlns:a="http://schemas.openxmlformats.org/drawingml/2006/main" noGrp="1"/>
+          </p:cNvSpPr>
+          <p:nvPr/>
+        </p:nvSpPr>
+        <p:spPr>
+          <a:xfrm xmlns:a="http://schemas.openxmlformats.org/drawingml/2006/main">
+            <a:off x="609600" y="4838700"/>
+            <a:ext cx="10972800" cy="381000"/>
+          </a:xfrm>
+          <a:prstGeom xmlns:a="http://schemas.openxmlformats.org/drawingml/2006/main" prst="rect">
+            <a:avLst/>
+          </a:prstGeom>
+          <a:noFill xmlns:a="http://schemas.openxmlformats.org/drawingml/2006/main"/>
+          <a:ln xmlns:a="http://schemas.openxmlformats.org/drawingml/2006/main" w="0">
+            <a:noFill/>
+          </a:ln>
+        </p:spPr>
+        <p:txBody>
+          <a:bodyPr xmlns:a="http://schemas.openxmlformats.org/drawingml/2006/main">
+            <a:noAutofit/>
+          </a:bodyPr>
+          <a:lstStyle xmlns:a="http://schemas.openxmlformats.org/drawingml/2006/main"/>
+          <a:p xmlns:a="http://schemas.openxmlformats.org/drawingml/2006/main">
+            <a:pPr>
+              <a:defRPr sz="2025" b="1">
+                <a:solidFill>
+                  <a:srgbClr val="DE690D"/>
+                </a:solidFill>
+                <a:latin typeface="Arial"/>
+                <a:ea typeface="Arial"/>
+                <a:cs typeface="Arial"/>
+              </a:defRPr>
+            </a:pPr>
+            <a:r>
+              <a:rPr sz="2025" b="1">
+                <a:solidFill>
+                  <a:srgbClr val="DE690D"/>
+                </a:solidFill>
+                <a:latin typeface="Arial"/>
+                <a:ea typeface="Arial"/>
+                <a:cs typeface="Arial"/>
+              </a:rPr>
+              <a:t>Alcance del Gantt</a:t>
+            </a:r>
+          </a:p>
+        </p:txBody>
+      </p:sp>
+      <p:sp>
+        <p:nvSpPr>
+          <p:cNvPr id="19" name="">
+            <a:extLst xmlns:a="http://schemas.openxmlformats.org/drawingml/2006/main">
+              <a:ext uri="{FF2B5EF4-FFF2-40B4-BE49-F238E27FC236}">
+                <a16:creationId xmlns:a16="http://schemas.microsoft.com/office/drawing/2014/main" id="{6D6651E3-E2E1-4482-BAFA-0B3422B58C9D}"/>
+              </a:ext>
+            </a:extLst>
+          </p:cNvPr>
+          <p:cNvSpPr>
+            <a:spLocks xmlns:a="http://schemas.openxmlformats.org/drawingml/2006/main" noGrp="1"/>
+          </p:cNvSpPr>
+          <p:nvPr/>
+        </p:nvSpPr>
+        <p:spPr>
+          <a:xfrm xmlns:a="http://schemas.openxmlformats.org/drawingml/2006/main">
+            <a:off x="609600" y="5267325"/>
+            <a:ext cx="10972800" cy="1123950"/>
+          </a:xfrm>
+          <a:prstGeom xmlns:a="http://schemas.openxmlformats.org/drawingml/2006/main" prst="rect">
+            <a:avLst/>
+          </a:prstGeom>
+          <a:noFill xmlns:a="http://schemas.openxmlformats.org/drawingml/2006/main"/>
+          <a:ln xmlns:a="http://schemas.openxmlformats.org/drawingml/2006/main" w="0">
+            <a:noFill/>
+          </a:ln>
+        </p:spPr>
+        <p:txBody>
+          <a:bodyPr xmlns:a="http://schemas.openxmlformats.org/drawingml/2006/main">
+            <a:noAutofit/>
+          </a:bodyPr>
+          <a:lstStyle xmlns:a="http://schemas.openxmlformats.org/drawingml/2006/main"/>
+          <a:p xmlns:a="http://schemas.openxmlformats.org/drawingml/2006/main">
+            <a:pPr>
+              <a:defRPr sz="1800" b="0">
+                <a:solidFill>
+                  <a:srgbClr val="253B4A"/>
+                </a:solidFill>
+                <a:latin typeface="Arial"/>
+                <a:ea typeface="Arial"/>
+                <a:cs typeface="Arial"/>
+              </a:defRPr>
+            </a:pPr>
+            <a:r>
+              <a:rPr sz="1800" b="0">
+                <a:solidFill>
+                  <a:srgbClr val="253B4A"/>
+                </a:solidFill>
+                <a:latin typeface="Arial"/>
+                <a:ea typeface="Arial"/>
+                <a:cs typeface="Arial"/>
+              </a:rPr>
+              <a:t>En este Gantt, «temática» y «planificación inicial» son pasos previos ya completados.</a:t>
+            </a:r>
+          </a:p>
+          <a:p xmlns:a="http://schemas.openxmlformats.org/drawingml/2006/main">
+            <a:pPr>
+              <a:defRPr sz="1800" b="0">
+                <a:solidFill>
+                  <a:srgbClr val="253B4A"/>
+                </a:solidFill>
+                <a:latin typeface="Arial"/>
+                <a:ea typeface="Arial"/>
+                <a:cs typeface="Arial"/>
+              </a:defRPr>
+            </a:pPr>
+            <a:r>
+              <a:rPr sz="1800" b="0">
+                <a:solidFill>
+                  <a:srgbClr val="253B4A"/>
+                </a:solidFill>
+                <a:latin typeface="Arial"/>
+                <a:ea typeface="Arial"/>
+                <a:cs typeface="Arial"/>
+              </a:rPr>
+              <a:t>Incluirlos como tareas pendientes al entregar el plan no es correcto.</a:t>
+            </a:r>
+          </a:p>
+          <a:p xmlns:a="http://schemas.openxmlformats.org/drawingml/2006/main">
+            <a:pPr>
+              <a:defRPr sz="1800" b="0">
+                <a:solidFill>
+                  <a:srgbClr val="253B4A"/>
+                </a:solidFill>
+                <a:latin typeface="Arial"/>
+                <a:ea typeface="Arial"/>
+                <a:cs typeface="Arial"/>
+              </a:defRPr>
+            </a:pPr>
+            <a:r>
+              <a:rPr sz="1800" b="0">
+                <a:solidFill>
+                  <a:srgbClr val="253B4A"/>
+                </a:solidFill>
+                <a:latin typeface="Arial"/>
+                <a:ea typeface="Arial"/>
+                <a:cs typeface="Arial"/>
+              </a:rPr>
+              <a:t>Cada tarea debe describir trabajo por realizar y un resultado comprobable.</a:t>
+            </a:r>
+          </a:p>
+        </p:txBody>
+      </p:sp>
+    </p:spTree>
+    <p:extLst>
+      <p:ext uri="{BB962C8B-B14F-4D97-AF65-F5344CB8AC3E}">
+        <p14:creationId xmlns:p14="http://schemas.microsoft.com/office/powerpoint/2010/main" val="729891034"/>
       </p:ext>
     </p:extLst>
   </p:cSld>
